--- a/assets/templates/bioinformatics-pipeline/a1-landscape/template.pptx
+++ b/assets/templates/bioinformatics-pipeline/a1-landscape/template.pptx
@@ -2,13 +2,13 @@
 <file path=ppt/presentation.xml><?xml version="1.0" encoding="utf-8"?>
 <p:presentation xmlns:p="http://schemas.openxmlformats.org/presentationml/2006/main">
   <p:sldMasterIdLst>
-    <p:sldMasterId xmlns:r="http://schemas.openxmlformats.org/officeDocument/2006/relationships" id="2147483648" r:id="R6193999768ee465d"/>
+    <p:sldMasterId xmlns:r="http://schemas.openxmlformats.org/officeDocument/2006/relationships" id="2147483648" r:id="R21a2c1be2b93427f"/>
   </p:sldMasterIdLst>
   <p:notesMasterIdLst>
-    <p:notesMasterId xmlns:r="http://schemas.openxmlformats.org/officeDocument/2006/relationships" r:id="R5b57fdb9c2d344ef"/>
+    <p:notesMasterId xmlns:r="http://schemas.openxmlformats.org/officeDocument/2006/relationships" r:id="R830efbd96af94828"/>
   </p:notesMasterIdLst>
   <p:sldIdLst>
-    <p:sldId xmlns:r="http://schemas.openxmlformats.org/officeDocument/2006/relationships" id="256" r:id="R1d9be6c6235a42b2"/>
+    <p:sldId xmlns:r="http://schemas.openxmlformats.org/officeDocument/2006/relationships" id="256" r:id="R7c8594b5f1184451"/>
   </p:sldIdLst>
   <p:sldSz cx="30279975" cy="21383625"/>
   <p:notesSz cx="6858000" cy="9144000"/>
@@ -525,7 +525,7 @@
   </p:cSld>
   <p:clrMap bg1="lt1" tx1="dk1" bg2="lt2" tx2="dk2" accent1="accent1" accent2="accent2" accent3="accent3" accent4="accent4" accent5="accent5" accent6="accent6" hlink="hlink" folHlink="folHlink"/>
   <p:sldLayoutIdLst>
-    <p:sldLayoutId xmlns:r="http://schemas.openxmlformats.org/officeDocument/2006/relationships" id="2147483649" r:id="Rbd283309f8f544ba"/>
+    <p:sldLayoutId xmlns:r="http://schemas.openxmlformats.org/officeDocument/2006/relationships" id="2147483649" r:id="R2f217ea9b6c24084"/>
   </p:sldLayoutIdLst>
   <p:txStyles>
     <p:titleStyle>
@@ -1073,10 +1073,10 @@
       </p:grpSpPr>
       <p:sp>
         <p:nvSpPr>
-          <p:cNvPr id="92" name="header-band">
-            <a:extLst xmlns:a="http://schemas.openxmlformats.org/drawingml/2006/main">
-              <a:ext uri="{FF2B5EF4-FFF2-40B4-BE49-F238E27FC236}">
-                <a16:creationId xmlns:a16="http://schemas.microsoft.com/office/drawing/2014/main" id="{2D2693EB-2FB0-47B1-9943-14D20A215294}"/>
+          <p:cNvPr id="93" name="header-band">
+            <a:extLst xmlns:a="http://schemas.openxmlformats.org/drawingml/2006/main">
+              <a:ext uri="{FF2B5EF4-FFF2-40B4-BE49-F238E27FC236}">
+                <a16:creationId xmlns:a16="http://schemas.microsoft.com/office/drawing/2014/main" id="{FDEF718C-4369-42C3-9230-94870D7594EC}"/>
               </a:ext>
             </a:extLst>
           </p:cNvPr>
@@ -1109,7 +1109,7 @@
           <p:cNvPr id="2" name="top-accent">
             <a:extLst xmlns:a="http://schemas.openxmlformats.org/drawingml/2006/main">
               <a:ext uri="{FF2B5EF4-FFF2-40B4-BE49-F238E27FC236}">
-                <a16:creationId xmlns:a16="http://schemas.microsoft.com/office/drawing/2014/main" id="{A1849427-55CA-49AB-BAF0-31070DAAACD3}"/>
+                <a16:creationId xmlns:a16="http://schemas.microsoft.com/office/drawing/2014/main" id="{5A011A06-D29E-4299-A424-D858D53D4F50}"/>
               </a:ext>
             </a:extLst>
           </p:cNvPr>
@@ -1142,7 +1142,7 @@
           <p:cNvPr id="3" name="poster-title">
             <a:extLst xmlns:a="http://schemas.openxmlformats.org/drawingml/2006/main">
               <a:ext uri="{FF2B5EF4-FFF2-40B4-BE49-F238E27FC236}">
-                <a16:creationId xmlns:a16="http://schemas.microsoft.com/office/drawing/2014/main" id="{1C941443-E4A1-48B1-9CD9-FF8B6CE07571}"/>
+                <a16:creationId xmlns:a16="http://schemas.microsoft.com/office/drawing/2014/main" id="{2D2C7EF2-6C1F-4F4B-A36F-09A213CF9C79}"/>
               </a:ext>
             </a:extLst>
           </p:cNvPr>
@@ -1170,14 +1170,14 @@
           <a:lstStyle xmlns:a="http://schemas.openxmlformats.org/drawingml/2006/main"/>
           <a:p xmlns:a="http://schemas.openxmlformats.org/drawingml/2006/main">
             <a:pPr>
-              <a:defRPr sz="5400" b="1">
+              <a:defRPr sz="5191" b="1">
                 <a:solidFill>
                   <a:srgbClr val="FFFFFF"/>
                 </a:solidFill>
               </a:defRPr>
             </a:pPr>
             <a:r>
-              <a:rPr sz="5400" b="1">
+              <a:rPr sz="5191" b="1">
                 <a:solidFill>
                   <a:srgbClr val="FFFFFF"/>
                 </a:solidFill>
@@ -1192,7 +1192,7 @@
           <p:cNvPr id="4" name="authors">
             <a:extLst xmlns:a="http://schemas.openxmlformats.org/drawingml/2006/main">
               <a:ext uri="{FF2B5EF4-FFF2-40B4-BE49-F238E27FC236}">
-                <a16:creationId xmlns:a16="http://schemas.microsoft.com/office/drawing/2014/main" id="{2005D4CF-8590-459A-BAE1-E34778509603}"/>
+                <a16:creationId xmlns:a16="http://schemas.microsoft.com/office/drawing/2014/main" id="{F4177EA1-5EEE-48A1-8970-5E1AC8778793}"/>
               </a:ext>
             </a:extLst>
           </p:cNvPr>
@@ -1220,14 +1220,14 @@
           <a:lstStyle xmlns:a="http://schemas.openxmlformats.org/drawingml/2006/main"/>
           <a:p xmlns:a="http://schemas.openxmlformats.org/drawingml/2006/main">
             <a:pPr>
-              <a:defRPr sz="2250" b="1">
+              <a:defRPr sz="1960" b="1">
                 <a:solidFill>
                   <a:srgbClr val="FFFFFF"/>
                 </a:solidFill>
               </a:defRPr>
             </a:pPr>
             <a:r>
-              <a:rPr sz="2250" b="1">
+              <a:rPr sz="1960" b="1">
                 <a:solidFill>
                   <a:srgbClr val="FFFFFF"/>
                 </a:solidFill>
@@ -1242,7 +1242,7 @@
           <p:cNvPr id="5" name="affiliations">
             <a:extLst xmlns:a="http://schemas.openxmlformats.org/drawingml/2006/main">
               <a:ext uri="{FF2B5EF4-FFF2-40B4-BE49-F238E27FC236}">
-                <a16:creationId xmlns:a16="http://schemas.microsoft.com/office/drawing/2014/main" id="{F5AB2077-9573-4CD5-9860-6F2CB08BF801}"/>
+                <a16:creationId xmlns:a16="http://schemas.microsoft.com/office/drawing/2014/main" id="{9F7BFC42-97E6-4040-B5D7-F0527AE93788}"/>
               </a:ext>
             </a:extLst>
           </p:cNvPr>
@@ -1270,14 +1270,14 @@
           <a:lstStyle xmlns:a="http://schemas.openxmlformats.org/drawingml/2006/main"/>
           <a:p xmlns:a="http://schemas.openxmlformats.org/drawingml/2006/main">
             <a:pPr>
-              <a:defRPr sz="1800">
+              <a:defRPr sz="1536">
                 <a:solidFill>
                   <a:srgbClr val="F6F8FA"/>
                 </a:solidFill>
               </a:defRPr>
             </a:pPr>
             <a:r>
-              <a:rPr sz="1800">
+              <a:rPr sz="1536">
                 <a:solidFill>
                   <a:srgbClr val="F6F8FA"/>
                 </a:solidFill>
@@ -1292,7 +1292,7 @@
           <p:cNvPr id="6" name="citation">
             <a:extLst xmlns:a="http://schemas.openxmlformats.org/drawingml/2006/main">
               <a:ext uri="{FF2B5EF4-FFF2-40B4-BE49-F238E27FC236}">
-                <a16:creationId xmlns:a16="http://schemas.microsoft.com/office/drawing/2014/main" id="{5D78AF0A-3519-4D85-8D2D-A621FD2A4257}"/>
+                <a16:creationId xmlns:a16="http://schemas.microsoft.com/office/drawing/2014/main" id="{7916EB56-4901-4A82-95C5-3CCB48E158EE}"/>
               </a:ext>
             </a:extLst>
           </p:cNvPr>
@@ -1320,14 +1320,14 @@
           <a:lstStyle xmlns:a="http://schemas.openxmlformats.org/drawingml/2006/main"/>
           <a:p xmlns:a="http://schemas.openxmlformats.org/drawingml/2006/main">
             <a:pPr>
-              <a:defRPr sz="1650" b="1">
+              <a:defRPr sz="1377" b="1">
                 <a:solidFill>
                   <a:srgbClr val="E8B44C"/>
                 </a:solidFill>
               </a:defRPr>
             </a:pPr>
             <a:r>
-              <a:rPr sz="1650" b="1">
+              <a:rPr sz="1377" b="1">
                 <a:solidFill>
                   <a:srgbClr val="E8B44C"/>
                 </a:solidFill>
@@ -1342,7 +1342,7 @@
           <p:cNvPr id="7" name="logo-slot-institution-logo">
             <a:extLst xmlns:a="http://schemas.openxmlformats.org/drawingml/2006/main">
               <a:ext uri="{FF2B5EF4-FFF2-40B4-BE49-F238E27FC236}">
-                <a16:creationId xmlns:a16="http://schemas.microsoft.com/office/drawing/2014/main" id="{84189875-F940-40D1-BA5F-B02083480FAF}"/>
+                <a16:creationId xmlns:a16="http://schemas.microsoft.com/office/drawing/2014/main" id="{D13DDABB-0AA3-4D2C-A2C7-60D233C6625D}"/>
               </a:ext>
             </a:extLst>
           </p:cNvPr>
@@ -1377,7 +1377,7 @@
           <p:cNvPr id="8" name="logo-placeholder-institution-logo">
             <a:extLst xmlns:a="http://schemas.openxmlformats.org/drawingml/2006/main">
               <a:ext uri="{FF2B5EF4-FFF2-40B4-BE49-F238E27FC236}">
-                <a16:creationId xmlns:a16="http://schemas.microsoft.com/office/drawing/2014/main" id="{D23D8291-399C-43CA-A533-4B4F29670414}"/>
+                <a16:creationId xmlns:a16="http://schemas.microsoft.com/office/drawing/2014/main" id="{340AC31F-DE4D-47E7-AA85-0EE872EA4370}"/>
               </a:ext>
             </a:extLst>
           </p:cNvPr>
@@ -1405,14 +1405,14 @@
           <a:lstStyle xmlns:a="http://schemas.openxmlformats.org/drawingml/2006/main"/>
           <a:p xmlns:a="http://schemas.openxmlformats.org/drawingml/2006/main">
             <a:pPr algn="ctr">
-              <a:defRPr sz="1650" b="1">
+              <a:defRPr sz="1430" b="1">
                 <a:solidFill>
                   <a:srgbClr val="0F5F73"/>
                 </a:solidFill>
               </a:defRPr>
             </a:pPr>
             <a:r>
-              <a:rPr sz="1650" b="1">
+              <a:rPr sz="1430" b="1">
                 <a:solidFill>
                   <a:srgbClr val="0F5F73"/>
                 </a:solidFill>
@@ -1427,7 +1427,7 @@
           <p:cNvPr id="9" name="header-summary">
             <a:extLst xmlns:a="http://schemas.openxmlformats.org/drawingml/2006/main">
               <a:ext uri="{FF2B5EF4-FFF2-40B4-BE49-F238E27FC236}">
-                <a16:creationId xmlns:a16="http://schemas.microsoft.com/office/drawing/2014/main" id="{448DDEF7-4E02-40AA-AE98-6B01AA99E078}"/>
+                <a16:creationId xmlns:a16="http://schemas.microsoft.com/office/drawing/2014/main" id="{643C1892-5742-4D89-9305-0F95E040D436}"/>
               </a:ext>
             </a:extLst>
           </p:cNvPr>
@@ -1460,7 +1460,7 @@
           <p:cNvPr id="10" name="header-metric-1-value">
             <a:extLst xmlns:a="http://schemas.openxmlformats.org/drawingml/2006/main">
               <a:ext uri="{FF2B5EF4-FFF2-40B4-BE49-F238E27FC236}">
-                <a16:creationId xmlns:a16="http://schemas.microsoft.com/office/drawing/2014/main" id="{09E96A11-CF75-49DD-9C45-6D787B226F88}"/>
+                <a16:creationId xmlns:a16="http://schemas.microsoft.com/office/drawing/2014/main" id="{5705F785-F64C-47DA-8F2F-58000315C4B2}"/>
               </a:ext>
             </a:extLst>
           </p:cNvPr>
@@ -1510,18 +1510,18 @@
           <p:cNvPr id="11" name="header-metric-1-label">
             <a:extLst xmlns:a="http://schemas.openxmlformats.org/drawingml/2006/main">
               <a:ext uri="{FF2B5EF4-FFF2-40B4-BE49-F238E27FC236}">
-                <a16:creationId xmlns:a16="http://schemas.microsoft.com/office/drawing/2014/main" id="{973DBF41-92C3-415D-ADA9-B2B530A5AAA9}"/>
-              </a:ext>
-            </a:extLst>
-          </p:cNvPr>
-          <p:cNvSpPr>
-            <a:spLocks xmlns:a="http://schemas.openxmlformats.org/drawingml/2006/main" noGrp="1"/>
-          </p:cNvSpPr>
-          <p:nvPr/>
-        </p:nvSpPr>
-        <p:spPr>
-          <a:xfrm xmlns:a="http://schemas.openxmlformats.org/drawingml/2006/main">
-            <a:off x="23178263" y="2165941"/>
+                <a16:creationId xmlns:a16="http://schemas.microsoft.com/office/drawing/2014/main" id="{E199743C-FF16-443C-9C46-B12F539F49C6}"/>
+              </a:ext>
+            </a:extLst>
+          </p:cNvPr>
+          <p:cNvSpPr>
+            <a:spLocks xmlns:a="http://schemas.openxmlformats.org/drawingml/2006/main" noGrp="1"/>
+          </p:cNvSpPr>
+          <p:nvPr/>
+        </p:nvSpPr>
+        <p:spPr>
+          <a:xfrm xmlns:a="http://schemas.openxmlformats.org/drawingml/2006/main">
+            <a:off x="23178263" y="2139035"/>
             <a:ext cx="1751845" cy="591934"/>
           </a:xfrm>
           <a:prstGeom xmlns:a="http://schemas.openxmlformats.org/drawingml/2006/main" prst="rect">
@@ -1538,19 +1538,19 @@
           <a:lstStyle xmlns:a="http://schemas.openxmlformats.org/drawingml/2006/main"/>
           <a:p xmlns:a="http://schemas.openxmlformats.org/drawingml/2006/main">
             <a:pPr>
-              <a:defRPr sz="1800" b="1">
-                <a:solidFill>
-                  <a:srgbClr val="102A43"/>
-                </a:solidFill>
-              </a:defRPr>
-            </a:pPr>
-            <a:r>
-              <a:rPr sz="1800" b="1">
-                <a:solidFill>
-                  <a:srgbClr val="102A43"/>
-                </a:solidFill>
-              </a:rPr>
-              <a:t>signature features</a:t>
+              <a:defRPr sz="1642" b="1">
+                <a:solidFill>
+                  <a:srgbClr val="102A43"/>
+                </a:solidFill>
+              </a:defRPr>
+            </a:pPr>
+            <a:r>
+              <a:rPr sz="1642" b="1">
+                <a:solidFill>
+                  <a:srgbClr val="102A43"/>
+                </a:solidFill>
+              </a:rPr>
+              <a:t>primary observations</a:t>
             </a:r>
           </a:p>
         </p:txBody>
@@ -1560,7 +1560,7 @@
           <p:cNvPr id="12" name="header-metric-2-value">
             <a:extLst xmlns:a="http://schemas.openxmlformats.org/drawingml/2006/main">
               <a:ext uri="{FF2B5EF4-FFF2-40B4-BE49-F238E27FC236}">
-                <a16:creationId xmlns:a16="http://schemas.microsoft.com/office/drawing/2014/main" id="{B9B93132-D916-49CA-A4B2-6C666D8D0629}"/>
+                <a16:creationId xmlns:a16="http://schemas.microsoft.com/office/drawing/2014/main" id="{5C5D0411-C33B-40FC-A0C2-CB8B0ACED974}"/>
               </a:ext>
             </a:extLst>
           </p:cNvPr>
@@ -1610,18 +1610,18 @@
           <p:cNvPr id="13" name="header-metric-2-label">
             <a:extLst xmlns:a="http://schemas.openxmlformats.org/drawingml/2006/main">
               <a:ext uri="{FF2B5EF4-FFF2-40B4-BE49-F238E27FC236}">
-                <a16:creationId xmlns:a16="http://schemas.microsoft.com/office/drawing/2014/main" id="{4E96E5A3-43AD-4107-9513-F0A051A13CD1}"/>
-              </a:ext>
-            </a:extLst>
-          </p:cNvPr>
-          <p:cNvSpPr>
-            <a:spLocks xmlns:a="http://schemas.openxmlformats.org/drawingml/2006/main" noGrp="1"/>
-          </p:cNvSpPr>
-          <p:nvPr/>
-        </p:nvSpPr>
-        <p:spPr>
-          <a:xfrm xmlns:a="http://schemas.openxmlformats.org/drawingml/2006/main">
-            <a:off x="25199623" y="2165941"/>
+                <a16:creationId xmlns:a16="http://schemas.microsoft.com/office/drawing/2014/main" id="{C580049A-1580-4F6F-9F84-FA467A8677F8}"/>
+              </a:ext>
+            </a:extLst>
+          </p:cNvPr>
+          <p:cNvSpPr>
+            <a:spLocks xmlns:a="http://schemas.openxmlformats.org/drawingml/2006/main" noGrp="1"/>
+          </p:cNvSpPr>
+          <p:nvPr/>
+        </p:nvSpPr>
+        <p:spPr>
+          <a:xfrm xmlns:a="http://schemas.openxmlformats.org/drawingml/2006/main">
+            <a:off x="25199623" y="2139035"/>
             <a:ext cx="1751845" cy="591934"/>
           </a:xfrm>
           <a:prstGeom xmlns:a="http://schemas.openxmlformats.org/drawingml/2006/main" prst="rect">
@@ -1638,19 +1638,19 @@
           <a:lstStyle xmlns:a="http://schemas.openxmlformats.org/drawingml/2006/main"/>
           <a:p xmlns:a="http://schemas.openxmlformats.org/drawingml/2006/main">
             <a:pPr>
-              <a:defRPr sz="1800" b="1">
-                <a:solidFill>
-                  <a:srgbClr val="102A43"/>
-                </a:solidFill>
-              </a:defRPr>
-            </a:pPr>
-            <a:r>
-              <a:rPr sz="1800" b="1">
-                <a:solidFill>
-                  <a:srgbClr val="102A43"/>
-                </a:solidFill>
-              </a:rPr>
-              <a:t>discovery samples</a:t>
+              <a:defRPr sz="1642" b="1">
+                <a:solidFill>
+                  <a:srgbClr val="102A43"/>
+                </a:solidFill>
+              </a:defRPr>
+            </a:pPr>
+            <a:r>
+              <a:rPr sz="1642" b="1">
+                <a:solidFill>
+                  <a:srgbClr val="102A43"/>
+                </a:solidFill>
+              </a:rPr>
+              <a:t>analysis samples</a:t>
             </a:r>
           </a:p>
         </p:txBody>
@@ -1660,7 +1660,7 @@
           <p:cNvPr id="14" name="header-metric-3-value">
             <a:extLst xmlns:a="http://schemas.openxmlformats.org/drawingml/2006/main">
               <a:ext uri="{FF2B5EF4-FFF2-40B4-BE49-F238E27FC236}">
-                <a16:creationId xmlns:a16="http://schemas.microsoft.com/office/drawing/2014/main" id="{8BC84DF8-26C6-405E-B94F-1CF0D1EC1EE7}"/>
+                <a16:creationId xmlns:a16="http://schemas.microsoft.com/office/drawing/2014/main" id="{EFBF3282-5E1E-46CC-B5BB-8F33B779B5C4}"/>
               </a:ext>
             </a:extLst>
           </p:cNvPr>
@@ -1710,18 +1710,18 @@
           <p:cNvPr id="15" name="header-metric-3-label">
             <a:extLst xmlns:a="http://schemas.openxmlformats.org/drawingml/2006/main">
               <a:ext uri="{FF2B5EF4-FFF2-40B4-BE49-F238E27FC236}">
-                <a16:creationId xmlns:a16="http://schemas.microsoft.com/office/drawing/2014/main" id="{EC3D488D-8EE0-4DD7-B068-B16AC5FFDFB4}"/>
-              </a:ext>
-            </a:extLst>
-          </p:cNvPr>
-          <p:cNvSpPr>
-            <a:spLocks xmlns:a="http://schemas.openxmlformats.org/drawingml/2006/main" noGrp="1"/>
-          </p:cNvSpPr>
-          <p:nvPr/>
-        </p:nvSpPr>
-        <p:spPr>
-          <a:xfrm xmlns:a="http://schemas.openxmlformats.org/drawingml/2006/main">
-            <a:off x="27220983" y="2165941"/>
+                <a16:creationId xmlns:a16="http://schemas.microsoft.com/office/drawing/2014/main" id="{129CA98F-DB57-4500-A805-EBE6B6E88C56}"/>
+              </a:ext>
+            </a:extLst>
+          </p:cNvPr>
+          <p:cNvSpPr>
+            <a:spLocks xmlns:a="http://schemas.openxmlformats.org/drawingml/2006/main" noGrp="1"/>
+          </p:cNvSpPr>
+          <p:nvPr/>
+        </p:nvSpPr>
+        <p:spPr>
+          <a:xfrm xmlns:a="http://schemas.openxmlformats.org/drawingml/2006/main">
+            <a:off x="27220983" y="2139035"/>
             <a:ext cx="1751845" cy="591934"/>
           </a:xfrm>
           <a:prstGeom xmlns:a="http://schemas.openxmlformats.org/drawingml/2006/main" prst="rect">
@@ -1738,19 +1738,19 @@
           <a:lstStyle xmlns:a="http://schemas.openxmlformats.org/drawingml/2006/main"/>
           <a:p xmlns:a="http://schemas.openxmlformats.org/drawingml/2006/main">
             <a:pPr>
-              <a:defRPr sz="1800" b="1">
-                <a:solidFill>
-                  <a:srgbClr val="102A43"/>
-                </a:solidFill>
-              </a:defRPr>
-            </a:pPr>
-            <a:r>
-              <a:rPr sz="1800" b="1">
-                <a:solidFill>
-                  <a:srgbClr val="102A43"/>
-                </a:solidFill>
-              </a:rPr>
-              <a:t>validation cohorts</a:t>
+              <a:defRPr sz="1642" b="1">
+                <a:solidFill>
+                  <a:srgbClr val="102A43"/>
+                </a:solidFill>
+              </a:defRPr>
+            </a:pPr>
+            <a:r>
+              <a:rPr sz="1642" b="1">
+                <a:solidFill>
+                  <a:srgbClr val="102A43"/>
+                </a:solidFill>
+              </a:rPr>
+              <a:t>validation units</a:t>
             </a:r>
           </a:p>
         </p:txBody>
@@ -1760,7 +1760,7 @@
           <p:cNvPr id="16" name="question-title">
             <a:extLst xmlns:a="http://schemas.openxmlformats.org/drawingml/2006/main">
               <a:ext uri="{FF2B5EF4-FFF2-40B4-BE49-F238E27FC236}">
-                <a16:creationId xmlns:a16="http://schemas.microsoft.com/office/drawing/2014/main" id="{42A04BDC-A43C-4223-9FC3-4C6C59926544}"/>
+                <a16:creationId xmlns:a16="http://schemas.microsoft.com/office/drawing/2014/main" id="{8D78A12F-A36D-41CD-9EC5-712E542E6DAB}"/>
               </a:ext>
             </a:extLst>
           </p:cNvPr>
@@ -1788,19 +1788,19 @@
           <a:lstStyle xmlns:a="http://schemas.openxmlformats.org/drawingml/2006/main"/>
           <a:p xmlns:a="http://schemas.openxmlformats.org/drawingml/2006/main">
             <a:pPr>
-              <a:defRPr sz="2850" b="1">
+              <a:defRPr sz="2542" b="1">
                 <a:solidFill>
                   <a:srgbClr val="0F5F73"/>
                 </a:solidFill>
               </a:defRPr>
             </a:pPr>
             <a:r>
-              <a:rPr sz="2850" b="1">
+              <a:rPr sz="2542" b="1">
                 <a:solidFill>
                   <a:srgbClr val="0F5F73"/>
                 </a:solidFill>
               </a:rPr>
-              <a:t>Research question</a:t>
+              <a:t>Biological question</a:t>
             </a:r>
           </a:p>
         </p:txBody>
@@ -1810,7 +1810,7 @@
           <p:cNvPr id="17" name="question-rule">
             <a:extLst xmlns:a="http://schemas.openxmlformats.org/drawingml/2006/main">
               <a:ext uri="{FF2B5EF4-FFF2-40B4-BE49-F238E27FC236}">
-                <a16:creationId xmlns:a16="http://schemas.microsoft.com/office/drawing/2014/main" id="{966CC940-3983-438C-857D-D1B7AF7C9E42}"/>
+                <a16:creationId xmlns:a16="http://schemas.microsoft.com/office/drawing/2014/main" id="{2EDAEFC2-6BB9-4155-A58F-C959B12D033C}"/>
               </a:ext>
             </a:extLst>
           </p:cNvPr>
@@ -1843,7 +1843,7 @@
           <p:cNvPr id="18" name="research-question">
             <a:extLst xmlns:a="http://schemas.openxmlformats.org/drawingml/2006/main">
               <a:ext uri="{FF2B5EF4-FFF2-40B4-BE49-F238E27FC236}">
-                <a16:creationId xmlns:a16="http://schemas.microsoft.com/office/drawing/2014/main" id="{F359D600-30D4-40FD-A624-58729D00FDED}"/>
+                <a16:creationId xmlns:a16="http://schemas.microsoft.com/office/drawing/2014/main" id="{9443AC54-03F9-4E7A-ABBA-76CBA453BB58}"/>
               </a:ext>
             </a:extLst>
           </p:cNvPr>
@@ -1855,7 +1855,7 @@
         <p:spPr>
           <a:xfrm xmlns:a="http://schemas.openxmlformats.org/drawingml/2006/main">
             <a:off x="943301" y="4587490"/>
-            <a:ext cx="8220198" cy="1580734"/>
+            <a:ext cx="8220198" cy="1479836"/>
           </a:xfrm>
           <a:prstGeom xmlns:a="http://schemas.openxmlformats.org/drawingml/2006/main" prst="rect">
             <a:avLst/>
@@ -1871,19 +1871,19 @@
           <a:lstStyle xmlns:a="http://schemas.openxmlformats.org/drawingml/2006/main"/>
           <a:p xmlns:a="http://schemas.openxmlformats.org/drawingml/2006/main">
             <a:pPr>
-              <a:defRPr sz="2805">
-                <a:solidFill>
-                  <a:srgbClr val="102A43"/>
-                </a:solidFill>
-              </a:defRPr>
-            </a:pPr>
-            <a:r>
-              <a:rPr sz="2805">
-                <a:solidFill>
-                  <a:srgbClr val="102A43"/>
-                </a:solidFill>
-              </a:rPr>
-              <a:t>State the biological or clinical question in two concise sentences.</a:t>
+              <a:defRPr sz="2013">
+                <a:solidFill>
+                  <a:srgbClr val="102A43"/>
+                </a:solidFill>
+              </a:defRPr>
+            </a:pPr>
+            <a:r>
+              <a:rPr sz="2013">
+                <a:solidFill>
+                  <a:srgbClr val="102A43"/>
+                </a:solidFill>
+              </a:rPr>
+              <a:t>State the scientific question in two concise sentences.</a:t>
             </a:r>
           </a:p>
         </p:txBody>
@@ -1893,7 +1893,7 @@
           <p:cNvPr id="19" name="question-evidence">
             <a:extLst xmlns:a="http://schemas.openxmlformats.org/drawingml/2006/main">
               <a:ext uri="{FF2B5EF4-FFF2-40B4-BE49-F238E27FC236}">
-                <a16:creationId xmlns:a16="http://schemas.microsoft.com/office/drawing/2014/main" id="{349C317B-6963-4933-84E5-9581AC9AE2CB}"/>
+                <a16:creationId xmlns:a16="http://schemas.microsoft.com/office/drawing/2014/main" id="{9CB7DE69-5512-4768-AAF2-D73EFC848531}"/>
               </a:ext>
             </a:extLst>
           </p:cNvPr>
@@ -1921,14 +1921,14 @@
           <a:lstStyle xmlns:a="http://schemas.openxmlformats.org/drawingml/2006/main"/>
           <a:p xmlns:a="http://schemas.openxmlformats.org/drawingml/2006/main">
             <a:pPr>
-              <a:defRPr sz="1650" i="1">
+              <a:defRPr sz="1324">
                 <a:solidFill>
                   <a:srgbClr val="2C8C99"/>
                 </a:solidFill>
               </a:defRPr>
             </a:pPr>
             <a:r>
-              <a:rPr sz="1650" i="1">
+              <a:rPr sz="1324">
                 <a:solidFill>
                   <a:srgbClr val="2C8C99"/>
                 </a:solidFill>
@@ -1943,7 +1943,7 @@
           <p:cNvPr id="20" name="pipeline-title">
             <a:extLst xmlns:a="http://schemas.openxmlformats.org/drawingml/2006/main">
               <a:ext uri="{FF2B5EF4-FFF2-40B4-BE49-F238E27FC236}">
-                <a16:creationId xmlns:a16="http://schemas.microsoft.com/office/drawing/2014/main" id="{C983BFDC-587F-485A-BA71-E881C54793D0}"/>
+                <a16:creationId xmlns:a16="http://schemas.microsoft.com/office/drawing/2014/main" id="{05266D9D-F7EE-4192-A215-3D5E76B23F2A}"/>
               </a:ext>
             </a:extLst>
           </p:cNvPr>
@@ -1971,14 +1971,14 @@
           <a:lstStyle xmlns:a="http://schemas.openxmlformats.org/drawingml/2006/main"/>
           <a:p xmlns:a="http://schemas.openxmlformats.org/drawingml/2006/main">
             <a:pPr>
-              <a:defRPr sz="2850" b="1">
+              <a:defRPr sz="2542" b="1">
                 <a:solidFill>
                   <a:srgbClr val="0F5F73"/>
                 </a:solidFill>
               </a:defRPr>
             </a:pPr>
             <a:r>
-              <a:rPr sz="2850" b="1">
+              <a:rPr sz="2542" b="1">
                 <a:solidFill>
                   <a:srgbClr val="0F5F73"/>
                 </a:solidFill>
@@ -1993,7 +1993,7 @@
           <p:cNvPr id="21" name="pipeline-rule">
             <a:extLst xmlns:a="http://schemas.openxmlformats.org/drawingml/2006/main">
               <a:ext uri="{FF2B5EF4-FFF2-40B4-BE49-F238E27FC236}">
-                <a16:creationId xmlns:a16="http://schemas.microsoft.com/office/drawing/2014/main" id="{D1DECDCC-FD72-43C0-A83A-35F84AD1FB8C}"/>
+                <a16:creationId xmlns:a16="http://schemas.microsoft.com/office/drawing/2014/main" id="{89DCF1D2-44A1-425B-8414-B2457EC5B6E0}"/>
               </a:ext>
             </a:extLst>
           </p:cNvPr>
@@ -2026,7 +2026,7 @@
           <p:cNvPr id="22" name="pipeline-1-number-bg">
             <a:extLst xmlns:a="http://schemas.openxmlformats.org/drawingml/2006/main">
               <a:ext uri="{FF2B5EF4-FFF2-40B4-BE49-F238E27FC236}">
-                <a16:creationId xmlns:a16="http://schemas.microsoft.com/office/drawing/2014/main" id="{C25B30A4-8148-480F-9B50-E90A0F64F796}"/>
+                <a16:creationId xmlns:a16="http://schemas.microsoft.com/office/drawing/2014/main" id="{C4084FCE-2302-4FE6-A1C7-C2FBE75AE3B3}"/>
               </a:ext>
             </a:extLst>
           </p:cNvPr>
@@ -2059,7 +2059,7 @@
           <p:cNvPr id="23" name="pipeline-1-number">
             <a:extLst xmlns:a="http://schemas.openxmlformats.org/drawingml/2006/main">
               <a:ext uri="{FF2B5EF4-FFF2-40B4-BE49-F238E27FC236}">
-                <a16:creationId xmlns:a16="http://schemas.microsoft.com/office/drawing/2014/main" id="{8C75D9A4-6B72-4BAC-9D84-9AB2A56E9BAF}"/>
+                <a16:creationId xmlns:a16="http://schemas.microsoft.com/office/drawing/2014/main" id="{80B47311-31DB-4F53-B938-EBB39DFC12DA}"/>
               </a:ext>
             </a:extLst>
           </p:cNvPr>
@@ -2087,14 +2087,14 @@
           <a:lstStyle xmlns:a="http://schemas.openxmlformats.org/drawingml/2006/main"/>
           <a:p xmlns:a="http://schemas.openxmlformats.org/drawingml/2006/main">
             <a:pPr algn="ctr">
-              <a:defRPr sz="1800" b="1">
-                <a:solidFill>
-                  <a:srgbClr val="102A43"/>
-                </a:solidFill>
-              </a:defRPr>
-            </a:pPr>
-            <a:r>
-              <a:rPr sz="1800" b="1">
+              <a:defRPr sz="1642" b="1">
+                <a:solidFill>
+                  <a:srgbClr val="102A43"/>
+                </a:solidFill>
+              </a:defRPr>
+            </a:pPr>
+            <a:r>
+              <a:rPr sz="1642" b="1">
                 <a:solidFill>
                   <a:srgbClr val="102A43"/>
                 </a:solidFill>
@@ -2109,7 +2109,7 @@
           <p:cNvPr id="24" name="pipeline-1-text">
             <a:extLst xmlns:a="http://schemas.openxmlformats.org/drawingml/2006/main">
               <a:ext uri="{FF2B5EF4-FFF2-40B4-BE49-F238E27FC236}">
-                <a16:creationId xmlns:a16="http://schemas.microsoft.com/office/drawing/2014/main" id="{73A187FD-D69B-4B37-858E-8AAC28662680}"/>
+                <a16:creationId xmlns:a16="http://schemas.microsoft.com/office/drawing/2014/main" id="{AA7B41EF-5DE6-4DFB-B6FF-1812BCA0413B}"/>
               </a:ext>
             </a:extLst>
           </p:cNvPr>
@@ -2137,14 +2137,14 @@
           <a:lstStyle xmlns:a="http://schemas.openxmlformats.org/drawingml/2006/main"/>
           <a:p xmlns:a="http://schemas.openxmlformats.org/drawingml/2006/main">
             <a:pPr>
-              <a:defRPr sz="2805" b="1">
-                <a:solidFill>
-                  <a:srgbClr val="102A43"/>
-                </a:solidFill>
-              </a:defRPr>
-            </a:pPr>
-            <a:r>
-              <a:rPr sz="2805" b="1">
+              <a:defRPr sz="2013">
+                <a:solidFill>
+                  <a:srgbClr val="102A43"/>
+                </a:solidFill>
+              </a:defRPr>
+            </a:pPr>
+            <a:r>
+              <a:rPr sz="2013">
                 <a:solidFill>
                   <a:srgbClr val="102A43"/>
                 </a:solidFill>
@@ -2159,7 +2159,7 @@
           <p:cNvPr id="25" name="pipeline-2-number-bg">
             <a:extLst xmlns:a="http://schemas.openxmlformats.org/drawingml/2006/main">
               <a:ext uri="{FF2B5EF4-FFF2-40B4-BE49-F238E27FC236}">
-                <a16:creationId xmlns:a16="http://schemas.microsoft.com/office/drawing/2014/main" id="{1DE334DE-06C7-4A32-BD86-120279B39AD9}"/>
+                <a16:creationId xmlns:a16="http://schemas.microsoft.com/office/drawing/2014/main" id="{740700C1-E9E0-4424-8678-14E6050227F2}"/>
               </a:ext>
             </a:extLst>
           </p:cNvPr>
@@ -2192,7 +2192,7 @@
           <p:cNvPr id="26" name="pipeline-2-number">
             <a:extLst xmlns:a="http://schemas.openxmlformats.org/drawingml/2006/main">
               <a:ext uri="{FF2B5EF4-FFF2-40B4-BE49-F238E27FC236}">
-                <a16:creationId xmlns:a16="http://schemas.microsoft.com/office/drawing/2014/main" id="{46662EF2-99DC-48F6-A271-678AC5187E55}"/>
+                <a16:creationId xmlns:a16="http://schemas.microsoft.com/office/drawing/2014/main" id="{899B311C-E081-4673-A61E-5C29F891B572}"/>
               </a:ext>
             </a:extLst>
           </p:cNvPr>
@@ -2220,14 +2220,14 @@
           <a:lstStyle xmlns:a="http://schemas.openxmlformats.org/drawingml/2006/main"/>
           <a:p xmlns:a="http://schemas.openxmlformats.org/drawingml/2006/main">
             <a:pPr algn="ctr">
-              <a:defRPr sz="1800" b="1">
-                <a:solidFill>
-                  <a:srgbClr val="102A43"/>
-                </a:solidFill>
-              </a:defRPr>
-            </a:pPr>
-            <a:r>
-              <a:rPr sz="1800" b="1">
+              <a:defRPr sz="1642" b="1">
+                <a:solidFill>
+                  <a:srgbClr val="102A43"/>
+                </a:solidFill>
+              </a:defRPr>
+            </a:pPr>
+            <a:r>
+              <a:rPr sz="1642" b="1">
                 <a:solidFill>
                   <a:srgbClr val="102A43"/>
                 </a:solidFill>
@@ -2242,7 +2242,7 @@
           <p:cNvPr id="27" name="pipeline-2-text">
             <a:extLst xmlns:a="http://schemas.openxmlformats.org/drawingml/2006/main">
               <a:ext uri="{FF2B5EF4-FFF2-40B4-BE49-F238E27FC236}">
-                <a16:creationId xmlns:a16="http://schemas.microsoft.com/office/drawing/2014/main" id="{0C2D2478-024B-4262-AAD9-3390F1B4F79D}"/>
+                <a16:creationId xmlns:a16="http://schemas.microsoft.com/office/drawing/2014/main" id="{54E4A51E-22E6-40E7-BC19-D6FD2E378BD9}"/>
               </a:ext>
             </a:extLst>
           </p:cNvPr>
@@ -2270,14 +2270,14 @@
           <a:lstStyle xmlns:a="http://schemas.openxmlformats.org/drawingml/2006/main"/>
           <a:p xmlns:a="http://schemas.openxmlformats.org/drawingml/2006/main">
             <a:pPr>
-              <a:defRPr sz="2805" b="1">
-                <a:solidFill>
-                  <a:srgbClr val="102A43"/>
-                </a:solidFill>
-              </a:defRPr>
-            </a:pPr>
-            <a:r>
-              <a:rPr sz="2805" b="1">
+              <a:defRPr sz="2013">
+                <a:solidFill>
+                  <a:srgbClr val="102A43"/>
+                </a:solidFill>
+              </a:defRPr>
+            </a:pPr>
+            <a:r>
+              <a:rPr sz="2013">
                 <a:solidFill>
                   <a:srgbClr val="102A43"/>
                 </a:solidFill>
@@ -2292,7 +2292,7 @@
           <p:cNvPr id="28" name="pipeline-3-number-bg">
             <a:extLst xmlns:a="http://schemas.openxmlformats.org/drawingml/2006/main">
               <a:ext uri="{FF2B5EF4-FFF2-40B4-BE49-F238E27FC236}">
-                <a16:creationId xmlns:a16="http://schemas.microsoft.com/office/drawing/2014/main" id="{611D6E3B-78AD-4488-9986-9A64764753CA}"/>
+                <a16:creationId xmlns:a16="http://schemas.microsoft.com/office/drawing/2014/main" id="{F7E97F92-91D3-4686-A7A7-09C3029692B2}"/>
               </a:ext>
             </a:extLst>
           </p:cNvPr>
@@ -2325,7 +2325,7 @@
           <p:cNvPr id="29" name="pipeline-3-number">
             <a:extLst xmlns:a="http://schemas.openxmlformats.org/drawingml/2006/main">
               <a:ext uri="{FF2B5EF4-FFF2-40B4-BE49-F238E27FC236}">
-                <a16:creationId xmlns:a16="http://schemas.microsoft.com/office/drawing/2014/main" id="{CA876EAD-FB15-4262-BFD4-C89125FB7AF2}"/>
+                <a16:creationId xmlns:a16="http://schemas.microsoft.com/office/drawing/2014/main" id="{033FF30A-4E2C-49B2-840F-5DBEC912F505}"/>
               </a:ext>
             </a:extLst>
           </p:cNvPr>
@@ -2353,14 +2353,14 @@
           <a:lstStyle xmlns:a="http://schemas.openxmlformats.org/drawingml/2006/main"/>
           <a:p xmlns:a="http://schemas.openxmlformats.org/drawingml/2006/main">
             <a:pPr algn="ctr">
-              <a:defRPr sz="1800" b="1">
-                <a:solidFill>
-                  <a:srgbClr val="102A43"/>
-                </a:solidFill>
-              </a:defRPr>
-            </a:pPr>
-            <a:r>
-              <a:rPr sz="1800" b="1">
+              <a:defRPr sz="1642" b="1">
+                <a:solidFill>
+                  <a:srgbClr val="102A43"/>
+                </a:solidFill>
+              </a:defRPr>
+            </a:pPr>
+            <a:r>
+              <a:rPr sz="1642" b="1">
                 <a:solidFill>
                   <a:srgbClr val="102A43"/>
                 </a:solidFill>
@@ -2375,7 +2375,7 @@
           <p:cNvPr id="30" name="pipeline-3-text">
             <a:extLst xmlns:a="http://schemas.openxmlformats.org/drawingml/2006/main">
               <a:ext uri="{FF2B5EF4-FFF2-40B4-BE49-F238E27FC236}">
-                <a16:creationId xmlns:a16="http://schemas.microsoft.com/office/drawing/2014/main" id="{3F8AD5A7-E3CD-4ED5-B051-B862892E94B5}"/>
+                <a16:creationId xmlns:a16="http://schemas.microsoft.com/office/drawing/2014/main" id="{9068FACB-F74C-43E8-8A37-4CC807DBB4D8}"/>
               </a:ext>
             </a:extLst>
           </p:cNvPr>
@@ -2403,14 +2403,14 @@
           <a:lstStyle xmlns:a="http://schemas.openxmlformats.org/drawingml/2006/main"/>
           <a:p xmlns:a="http://schemas.openxmlformats.org/drawingml/2006/main">
             <a:pPr>
-              <a:defRPr sz="2805" b="1">
-                <a:solidFill>
-                  <a:srgbClr val="102A43"/>
-                </a:solidFill>
-              </a:defRPr>
-            </a:pPr>
-            <a:r>
-              <a:rPr sz="2805" b="1">
+              <a:defRPr sz="2013">
+                <a:solidFill>
+                  <a:srgbClr val="102A43"/>
+                </a:solidFill>
+              </a:defRPr>
+            </a:pPr>
+            <a:r>
+              <a:rPr sz="2013">
                 <a:solidFill>
                   <a:srgbClr val="102A43"/>
                 </a:solidFill>
@@ -2425,7 +2425,7 @@
           <p:cNvPr id="31" name="pipeline-4-number-bg">
             <a:extLst xmlns:a="http://schemas.openxmlformats.org/drawingml/2006/main">
               <a:ext uri="{FF2B5EF4-FFF2-40B4-BE49-F238E27FC236}">
-                <a16:creationId xmlns:a16="http://schemas.microsoft.com/office/drawing/2014/main" id="{E80D6CAA-70EB-425A-8631-7CFDBC66A5AD}"/>
+                <a16:creationId xmlns:a16="http://schemas.microsoft.com/office/drawing/2014/main" id="{F22D7C11-895D-4A76-BDEA-710D7CAF581E}"/>
               </a:ext>
             </a:extLst>
           </p:cNvPr>
@@ -2458,7 +2458,7 @@
           <p:cNvPr id="32" name="pipeline-4-number">
             <a:extLst xmlns:a="http://schemas.openxmlformats.org/drawingml/2006/main">
               <a:ext uri="{FF2B5EF4-FFF2-40B4-BE49-F238E27FC236}">
-                <a16:creationId xmlns:a16="http://schemas.microsoft.com/office/drawing/2014/main" id="{D2F53233-0FEB-46A9-9202-59A6BF22DC9E}"/>
+                <a16:creationId xmlns:a16="http://schemas.microsoft.com/office/drawing/2014/main" id="{10B5AF13-450D-4D15-90B2-11114552881D}"/>
               </a:ext>
             </a:extLst>
           </p:cNvPr>
@@ -2486,14 +2486,14 @@
           <a:lstStyle xmlns:a="http://schemas.openxmlformats.org/drawingml/2006/main"/>
           <a:p xmlns:a="http://schemas.openxmlformats.org/drawingml/2006/main">
             <a:pPr algn="ctr">
-              <a:defRPr sz="1800" b="1">
-                <a:solidFill>
-                  <a:srgbClr val="102A43"/>
-                </a:solidFill>
-              </a:defRPr>
-            </a:pPr>
-            <a:r>
-              <a:rPr sz="1800" b="1">
+              <a:defRPr sz="1642" b="1">
+                <a:solidFill>
+                  <a:srgbClr val="102A43"/>
+                </a:solidFill>
+              </a:defRPr>
+            </a:pPr>
+            <a:r>
+              <a:rPr sz="1642" b="1">
                 <a:solidFill>
                   <a:srgbClr val="102A43"/>
                 </a:solidFill>
@@ -2508,7 +2508,7 @@
           <p:cNvPr id="33" name="pipeline-4-text">
             <a:extLst xmlns:a="http://schemas.openxmlformats.org/drawingml/2006/main">
               <a:ext uri="{FF2B5EF4-FFF2-40B4-BE49-F238E27FC236}">
-                <a16:creationId xmlns:a16="http://schemas.microsoft.com/office/drawing/2014/main" id="{06A52DD0-4FFC-4259-8B8E-1F41AC702675}"/>
+                <a16:creationId xmlns:a16="http://schemas.microsoft.com/office/drawing/2014/main" id="{7C128205-792D-44D6-85CD-CFFE2C20366D}"/>
               </a:ext>
             </a:extLst>
           </p:cNvPr>
@@ -2536,14 +2536,14 @@
           <a:lstStyle xmlns:a="http://schemas.openxmlformats.org/drawingml/2006/main"/>
           <a:p xmlns:a="http://schemas.openxmlformats.org/drawingml/2006/main">
             <a:pPr>
-              <a:defRPr sz="2805" b="1">
-                <a:solidFill>
-                  <a:srgbClr val="102A43"/>
-                </a:solidFill>
-              </a:defRPr>
-            </a:pPr>
-            <a:r>
-              <a:rPr sz="2805" b="1">
+              <a:defRPr sz="2013">
+                <a:solidFill>
+                  <a:srgbClr val="102A43"/>
+                </a:solidFill>
+              </a:defRPr>
+            </a:pPr>
+            <a:r>
+              <a:rPr sz="2013">
                 <a:solidFill>
                   <a:srgbClr val="102A43"/>
                 </a:solidFill>
@@ -2558,7 +2558,7 @@
           <p:cNvPr id="34" name="dataset-panel">
             <a:extLst xmlns:a="http://schemas.openxmlformats.org/drawingml/2006/main">
               <a:ext uri="{FF2B5EF4-FFF2-40B4-BE49-F238E27FC236}">
-                <a16:creationId xmlns:a16="http://schemas.microsoft.com/office/drawing/2014/main" id="{BC08E5C3-C44B-4A08-84AE-24EF60FE9F16}"/>
+                <a16:creationId xmlns:a16="http://schemas.microsoft.com/office/drawing/2014/main" id="{06BB809A-41E6-4F03-8EE4-28BBA9176B87}"/>
               </a:ext>
             </a:extLst>
           </p:cNvPr>
@@ -2593,7 +2593,7 @@
           <p:cNvPr id="35" name="dataset-kicker">
             <a:extLst xmlns:a="http://schemas.openxmlformats.org/drawingml/2006/main">
               <a:ext uri="{FF2B5EF4-FFF2-40B4-BE49-F238E27FC236}">
-                <a16:creationId xmlns:a16="http://schemas.microsoft.com/office/drawing/2014/main" id="{E7CC5768-5C1B-48F5-8F1D-171B5D43249C}"/>
+                <a16:creationId xmlns:a16="http://schemas.microsoft.com/office/drawing/2014/main" id="{8F9351BB-2EA4-4D1D-9A11-12FD9567930A}"/>
               </a:ext>
             </a:extLst>
           </p:cNvPr>
@@ -2621,14 +2621,14 @@
           <a:lstStyle xmlns:a="http://schemas.openxmlformats.org/drawingml/2006/main"/>
           <a:p xmlns:a="http://schemas.openxmlformats.org/drawingml/2006/main">
             <a:pPr>
-              <a:defRPr sz="1800" b="1">
+              <a:defRPr sz="1536" b="1">
                 <a:solidFill>
                   <a:srgbClr val="0F5F73"/>
                 </a:solidFill>
               </a:defRPr>
             </a:pPr>
             <a:r>
-              <a:rPr sz="1800" b="1">
+              <a:rPr sz="1536" b="1">
                 <a:solidFill>
                   <a:srgbClr val="0F5F73"/>
                 </a:solidFill>
@@ -2643,7 +2643,7 @@
           <p:cNvPr id="36" name="datasets">
             <a:extLst xmlns:a="http://schemas.openxmlformats.org/drawingml/2006/main">
               <a:ext uri="{FF2B5EF4-FFF2-40B4-BE49-F238E27FC236}">
-                <a16:creationId xmlns:a16="http://schemas.microsoft.com/office/drawing/2014/main" id="{5867B5C0-656B-4D34-AE74-0F1D044A8653}"/>
+                <a16:creationId xmlns:a16="http://schemas.microsoft.com/office/drawing/2014/main" id="{AA822E70-56BF-4ACC-AE09-BD1F3AAA99C6}"/>
               </a:ext>
             </a:extLst>
           </p:cNvPr>
@@ -2655,7 +2655,7 @@
         <p:spPr>
           <a:xfrm xmlns:a="http://schemas.openxmlformats.org/drawingml/2006/main">
             <a:off x="1131962" y="10056156"/>
-            <a:ext cx="7842877" cy="1547101"/>
+            <a:ext cx="7842877" cy="1452930"/>
           </a:xfrm>
           <a:prstGeom xmlns:a="http://schemas.openxmlformats.org/drawingml/2006/main" prst="rect">
             <a:avLst/>
@@ -2671,70 +2671,70 @@
           <a:lstStyle xmlns:a="http://schemas.openxmlformats.org/drawingml/2006/main"/>
           <a:p xmlns:a="http://schemas.openxmlformats.org/drawingml/2006/main">
             <a:pPr>
-              <a:defRPr sz="2805">
-                <a:solidFill>
-                  <a:srgbClr val="102A43"/>
-                </a:solidFill>
-              </a:defRPr>
-            </a:pPr>
-            <a:r>
-              <a:rPr sz="2805">
-                <a:solidFill>
-                  <a:srgbClr val="102A43"/>
-                </a:solidFill>
-              </a:rPr>
-              <a:t>Discovery cohort</a:t>
+              <a:defRPr sz="2013">
+                <a:solidFill>
+                  <a:srgbClr val="102A43"/>
+                </a:solidFill>
+              </a:defRPr>
+            </a:pPr>
+            <a:r>
+              <a:rPr sz="2013">
+                <a:solidFill>
+                  <a:srgbClr val="102A43"/>
+                </a:solidFill>
+              </a:rPr>
+              <a:t>Discovery set</a:t>
             </a:r>
           </a:p>
           <a:p xmlns:a="http://schemas.openxmlformats.org/drawingml/2006/main">
             <a:pPr>
-              <a:defRPr sz="2805">
-                <a:solidFill>
-                  <a:srgbClr val="102A43"/>
-                </a:solidFill>
-              </a:defRPr>
-            </a:pPr>
-            <a:r>
-              <a:rPr sz="2805">
-                <a:solidFill>
-                  <a:srgbClr val="102A43"/>
-                </a:solidFill>
-              </a:rPr>
-              <a:t>Training and test split</a:t>
+              <a:defRPr sz="2013">
+                <a:solidFill>
+                  <a:srgbClr val="102A43"/>
+                </a:solidFill>
+              </a:defRPr>
+            </a:pPr>
+            <a:r>
+              <a:rPr sz="2013">
+                <a:solidFill>
+                  <a:srgbClr val="102A43"/>
+                </a:solidFill>
+              </a:rPr>
+              <a:t>Primary analysis</a:t>
             </a:r>
           </a:p>
           <a:p xmlns:a="http://schemas.openxmlformats.org/drawingml/2006/main">
             <a:pPr>
-              <a:defRPr sz="2805">
-                <a:solidFill>
-                  <a:srgbClr val="102A43"/>
-                </a:solidFill>
-              </a:defRPr>
-            </a:pPr>
-            <a:r>
-              <a:rPr sz="2805">
-                <a:solidFill>
-                  <a:srgbClr val="102A43"/>
-                </a:solidFill>
-              </a:rPr>
-              <a:t>External validation</a:t>
+              <a:defRPr sz="2013">
+                <a:solidFill>
+                  <a:srgbClr val="102A43"/>
+                </a:solidFill>
+              </a:defRPr>
+            </a:pPr>
+            <a:r>
+              <a:rPr sz="2013">
+                <a:solidFill>
+                  <a:srgbClr val="102A43"/>
+                </a:solidFill>
+              </a:rPr>
+              <a:t>Validation set</a:t>
             </a:r>
           </a:p>
           <a:p xmlns:a="http://schemas.openxmlformats.org/drawingml/2006/main">
             <a:pPr>
-              <a:defRPr sz="2805">
-                <a:solidFill>
-                  <a:srgbClr val="102A43"/>
-                </a:solidFill>
-              </a:defRPr>
-            </a:pPr>
-            <a:r>
-              <a:rPr sz="2805">
-                <a:solidFill>
-                  <a:srgbClr val="102A43"/>
-                </a:solidFill>
-              </a:rPr>
-              <a:t>Orthogonal validation</a:t>
+              <a:defRPr sz="2013">
+                <a:solidFill>
+                  <a:srgbClr val="102A43"/>
+                </a:solidFill>
+              </a:defRPr>
+            </a:pPr>
+            <a:r>
+              <a:rPr sz="2013">
+                <a:solidFill>
+                  <a:srgbClr val="102A43"/>
+                </a:solidFill>
+              </a:rPr>
+              <a:t>Sensitivity analysis</a:t>
             </a:r>
           </a:p>
         </p:txBody>
@@ -2744,7 +2744,7 @@
           <p:cNvPr id="37" name="dataset-evidence">
             <a:extLst xmlns:a="http://schemas.openxmlformats.org/drawingml/2006/main">
               <a:ext uri="{FF2B5EF4-FFF2-40B4-BE49-F238E27FC236}">
-                <a16:creationId xmlns:a16="http://schemas.microsoft.com/office/drawing/2014/main" id="{F9B94998-EAD5-4073-BC11-8C9873F8A1FA}"/>
+                <a16:creationId xmlns:a16="http://schemas.microsoft.com/office/drawing/2014/main" id="{5AF22885-4DD8-43EB-AB44-0BD3455DD40D}"/>
               </a:ext>
             </a:extLst>
           </p:cNvPr>
@@ -2772,14 +2772,14 @@
           <a:lstStyle xmlns:a="http://schemas.openxmlformats.org/drawingml/2006/main"/>
           <a:p xmlns:a="http://schemas.openxmlformats.org/drawingml/2006/main">
             <a:pPr>
-              <a:defRPr sz="1650" i="1">
+              <a:defRPr sz="1324">
                 <a:solidFill>
                   <a:srgbClr val="2C8C99"/>
                 </a:solidFill>
               </a:defRPr>
             </a:pPr>
             <a:r>
-              <a:rPr sz="1650" i="1">
+              <a:rPr sz="1324">
                 <a:solidFill>
                   <a:srgbClr val="2C8C99"/>
                 </a:solidFill>
@@ -2794,7 +2794,7 @@
           <p:cNvPr id="38" name="figure-one-heading-title">
             <a:extLst xmlns:a="http://schemas.openxmlformats.org/drawingml/2006/main">
               <a:ext uri="{FF2B5EF4-FFF2-40B4-BE49-F238E27FC236}">
-                <a16:creationId xmlns:a16="http://schemas.microsoft.com/office/drawing/2014/main" id="{A136D8DC-6FF1-423C-9C79-1EA12C1B09E8}"/>
+                <a16:creationId xmlns:a16="http://schemas.microsoft.com/office/drawing/2014/main" id="{FE0B8B09-E854-468E-87BA-0470B41D2FF3}"/>
               </a:ext>
             </a:extLst>
           </p:cNvPr>
@@ -2822,14 +2822,14 @@
           <a:lstStyle xmlns:a="http://schemas.openxmlformats.org/drawingml/2006/main"/>
           <a:p xmlns:a="http://schemas.openxmlformats.org/drawingml/2006/main">
             <a:pPr>
-              <a:defRPr sz="2850" b="1">
+              <a:defRPr sz="2542" b="1">
                 <a:solidFill>
                   <a:srgbClr val="0F5F73"/>
                 </a:solidFill>
               </a:defRPr>
             </a:pPr>
             <a:r>
-              <a:rPr sz="2850" b="1">
+              <a:rPr sz="2542" b="1">
                 <a:solidFill>
                   <a:srgbClr val="0F5F73"/>
                 </a:solidFill>
@@ -2844,7 +2844,7 @@
           <p:cNvPr id="39" name="figure-one-heading-rule">
             <a:extLst xmlns:a="http://schemas.openxmlformats.org/drawingml/2006/main">
               <a:ext uri="{FF2B5EF4-FFF2-40B4-BE49-F238E27FC236}">
-                <a16:creationId xmlns:a16="http://schemas.microsoft.com/office/drawing/2014/main" id="{5B21DB10-EE18-4978-B323-3E4AB8EC4FA6}"/>
+                <a16:creationId xmlns:a16="http://schemas.microsoft.com/office/drawing/2014/main" id="{881EAEE5-8E7A-485E-A759-C58909C35995}"/>
               </a:ext>
             </a:extLst>
           </p:cNvPr>
@@ -2877,7 +2877,7 @@
           <p:cNvPr id="40" name="figure-one-frame">
             <a:extLst xmlns:a="http://schemas.openxmlformats.org/drawingml/2006/main">
               <a:ext uri="{FF2B5EF4-FFF2-40B4-BE49-F238E27FC236}">
-                <a16:creationId xmlns:a16="http://schemas.microsoft.com/office/drawing/2014/main" id="{4F6F57B8-FE69-4FF2-8E2F-E7ADDF8BC945}"/>
+                <a16:creationId xmlns:a16="http://schemas.microsoft.com/office/drawing/2014/main" id="{18BE0210-CEC7-4D0D-AE76-05E8C056EB20}"/>
               </a:ext>
             </a:extLst>
           </p:cNvPr>
@@ -2912,7 +2912,7 @@
           <p:cNvPr id="41" name="figure-one-placeholder">
             <a:extLst xmlns:a="http://schemas.openxmlformats.org/drawingml/2006/main">
               <a:ext uri="{FF2B5EF4-FFF2-40B4-BE49-F238E27FC236}">
-                <a16:creationId xmlns:a16="http://schemas.microsoft.com/office/drawing/2014/main" id="{7E990ED0-1B2E-4F2C-B653-472D096B48C3}"/>
+                <a16:creationId xmlns:a16="http://schemas.microsoft.com/office/drawing/2014/main" id="{7AE8A05A-D0C2-4B3B-88FB-A7AF337013A6}"/>
               </a:ext>
             </a:extLst>
           </p:cNvPr>
@@ -2947,7 +2947,7 @@
           <p:cNvPr id="42" name="figure-one-placeholder-label">
             <a:extLst xmlns:a="http://schemas.openxmlformats.org/drawingml/2006/main">
               <a:ext uri="{FF2B5EF4-FFF2-40B4-BE49-F238E27FC236}">
-                <a16:creationId xmlns:a16="http://schemas.microsoft.com/office/drawing/2014/main" id="{F4CE38F0-FBB6-4D31-9D7D-DEC2BBA2E45A}"/>
+                <a16:creationId xmlns:a16="http://schemas.microsoft.com/office/drawing/2014/main" id="{01673230-BFE5-4961-B0B3-D117BAA2AFE0}"/>
               </a:ext>
             </a:extLst>
           </p:cNvPr>
@@ -2975,19 +2975,19 @@
           <a:lstStyle xmlns:a="http://schemas.openxmlformats.org/drawingml/2006/main"/>
           <a:p xmlns:a="http://schemas.openxmlformats.org/drawingml/2006/main">
             <a:pPr algn="ctr">
-              <a:defRPr sz="2100" b="1">
+              <a:defRPr sz="1907" b="1">
                 <a:solidFill>
                   <a:srgbClr val="2C8C99"/>
                 </a:solidFill>
               </a:defRPr>
             </a:pPr>
             <a:r>
-              <a:rPr sz="2100" b="1">
+              <a:rPr sz="1907" b="1">
                 <a:solidFill>
                   <a:srgbClr val="2C8C99"/>
                 </a:solidFill>
               </a:rPr>
-              <a:t>SCIENTIFIC FIGURE</a:t>
+              <a:t>scientific figure</a:t>
             </a:r>
           </a:p>
         </p:txBody>
@@ -2997,7 +2997,7 @@
           <p:cNvPr id="43" name="figure-one-caption">
             <a:extLst xmlns:a="http://schemas.openxmlformats.org/drawingml/2006/main">
               <a:ext uri="{FF2B5EF4-FFF2-40B4-BE49-F238E27FC236}">
-                <a16:creationId xmlns:a16="http://schemas.microsoft.com/office/drawing/2014/main" id="{B58AC741-D2A0-43D8-84F1-A31B96D48522}"/>
+                <a16:creationId xmlns:a16="http://schemas.microsoft.com/office/drawing/2014/main" id="{AB9929ED-EB5E-41DC-A03D-99FBC75B9BDC}"/>
               </a:ext>
             </a:extLst>
           </p:cNvPr>
@@ -3009,7 +3009,7 @@
         <p:spPr>
           <a:xfrm xmlns:a="http://schemas.openxmlformats.org/drawingml/2006/main">
             <a:off x="1105010" y="19392573"/>
-            <a:ext cx="7896780" cy="282514"/>
+            <a:ext cx="7896780" cy="221975"/>
           </a:xfrm>
           <a:prstGeom xmlns:a="http://schemas.openxmlformats.org/drawingml/2006/main" prst="rect">
             <a:avLst/>
@@ -3025,19 +3025,19 @@
           <a:lstStyle xmlns:a="http://schemas.openxmlformats.org/drawingml/2006/main"/>
           <a:p xmlns:a="http://schemas.openxmlformats.org/drawingml/2006/main">
             <a:pPr>
-              <a:defRPr sz="2205" b="1">
-                <a:solidFill>
-                  <a:srgbClr val="102A43"/>
-                </a:solidFill>
-              </a:defRPr>
-            </a:pPr>
-            <a:r>
-              <a:rPr sz="2205" b="1">
-                <a:solidFill>
-                  <a:srgbClr val="102A43"/>
-                </a:solidFill>
-              </a:rPr>
-              <a:t>Figure caption</a:t>
+              <a:defRPr sz="1589" b="1">
+                <a:solidFill>
+                  <a:srgbClr val="102A43"/>
+                </a:solidFill>
+              </a:defRPr>
+            </a:pPr>
+            <a:r>
+              <a:rPr sz="1589" b="1">
+                <a:solidFill>
+                  <a:srgbClr val="102A43"/>
+                </a:solidFill>
+              </a:rPr>
+              <a:t>Scientific Figure caption</a:t>
             </a:r>
           </a:p>
         </p:txBody>
@@ -3047,18 +3047,18 @@
           <p:cNvPr id="44" name="figure-one-source">
             <a:extLst xmlns:a="http://schemas.openxmlformats.org/drawingml/2006/main">
               <a:ext uri="{FF2B5EF4-FFF2-40B4-BE49-F238E27FC236}">
-                <a16:creationId xmlns:a16="http://schemas.microsoft.com/office/drawing/2014/main" id="{5BFA1099-934C-4FF4-A055-85D82AFB73A1}"/>
-              </a:ext>
-            </a:extLst>
-          </p:cNvPr>
-          <p:cNvSpPr>
-            <a:spLocks xmlns:a="http://schemas.openxmlformats.org/drawingml/2006/main" noGrp="1"/>
-          </p:cNvSpPr>
-          <p:nvPr/>
-        </p:nvSpPr>
-        <p:spPr>
-          <a:xfrm xmlns:a="http://schemas.openxmlformats.org/drawingml/2006/main">
-            <a:off x="1105010" y="19614549"/>
+                <a16:creationId xmlns:a16="http://schemas.microsoft.com/office/drawing/2014/main" id="{B6E20EA0-CC36-4155-A22A-E0EE6D347F27}"/>
+              </a:ext>
+            </a:extLst>
+          </p:cNvPr>
+          <p:cNvSpPr>
+            <a:spLocks xmlns:a="http://schemas.openxmlformats.org/drawingml/2006/main" noGrp="1"/>
+          </p:cNvSpPr>
+          <p:nvPr/>
+        </p:nvSpPr>
+        <p:spPr>
+          <a:xfrm xmlns:a="http://schemas.openxmlformats.org/drawingml/2006/main">
+            <a:off x="1105010" y="19621275"/>
             <a:ext cx="7896780" cy="255608"/>
           </a:xfrm>
           <a:prstGeom xmlns:a="http://schemas.openxmlformats.org/drawingml/2006/main" prst="rect">
@@ -3075,14 +3075,14 @@
           <a:lstStyle xmlns:a="http://schemas.openxmlformats.org/drawingml/2006/main"/>
           <a:p xmlns:a="http://schemas.openxmlformats.org/drawingml/2006/main">
             <a:pPr>
-              <a:defRPr sz="1650" i="1">
+              <a:defRPr sz="1324">
                 <a:solidFill>
                   <a:srgbClr val="2C8C99"/>
                 </a:solidFill>
               </a:defRPr>
             </a:pPr>
             <a:r>
-              <a:rPr sz="1650" i="1">
+              <a:rPr sz="1324">
                 <a:solidFill>
                   <a:srgbClr val="2C8C99"/>
                 </a:solidFill>
@@ -3097,7 +3097,7 @@
           <p:cNvPr id="45" name="central-takeaway">
             <a:extLst xmlns:a="http://schemas.openxmlformats.org/drawingml/2006/main">
               <a:ext uri="{FF2B5EF4-FFF2-40B4-BE49-F238E27FC236}">
-                <a16:creationId xmlns:a16="http://schemas.microsoft.com/office/drawing/2014/main" id="{2CFCFF51-AF87-44EE-A642-E2FE309492D1}"/>
+                <a16:creationId xmlns:a16="http://schemas.microsoft.com/office/drawing/2014/main" id="{29BCA2DD-85D7-4EE8-B135-C7D1E3098CF3}"/>
               </a:ext>
             </a:extLst>
           </p:cNvPr>
@@ -3130,7 +3130,7 @@
           <p:cNvPr id="46" name="central-takeaway-title">
             <a:extLst xmlns:a="http://schemas.openxmlformats.org/drawingml/2006/main">
               <a:ext uri="{FF2B5EF4-FFF2-40B4-BE49-F238E27FC236}">
-                <a16:creationId xmlns:a16="http://schemas.microsoft.com/office/drawing/2014/main" id="{80607441-A0B4-4D9E-8D3E-103C7B423EBA}"/>
+                <a16:creationId xmlns:a16="http://schemas.microsoft.com/office/drawing/2014/main" id="{B139963C-A92F-4065-8F8D-9BC93E058E6B}"/>
               </a:ext>
             </a:extLst>
           </p:cNvPr>
@@ -3158,14 +3158,14 @@
           <a:lstStyle xmlns:a="http://schemas.openxmlformats.org/drawingml/2006/main"/>
           <a:p xmlns:a="http://schemas.openxmlformats.org/drawingml/2006/main">
             <a:pPr algn="ctr">
-              <a:defRPr sz="3150" b="1">
-                <a:solidFill>
-                  <a:srgbClr val="102A43"/>
-                </a:solidFill>
-              </a:defRPr>
-            </a:pPr>
-            <a:r>
-              <a:rPr sz="3150" b="1">
+              <a:defRPr sz="2913" b="1">
+                <a:solidFill>
+                  <a:srgbClr val="102A43"/>
+                </a:solidFill>
+              </a:defRPr>
+            </a:pPr>
+            <a:r>
+              <a:rPr sz="2913" b="1">
                 <a:solidFill>
                   <a:srgbClr val="102A43"/>
                 </a:solidFill>
@@ -3180,7 +3180,7 @@
           <p:cNvPr id="47" name="central-takeaway-subtitle">
             <a:extLst xmlns:a="http://schemas.openxmlformats.org/drawingml/2006/main">
               <a:ext uri="{FF2B5EF4-FFF2-40B4-BE49-F238E27FC236}">
-                <a16:creationId xmlns:a16="http://schemas.microsoft.com/office/drawing/2014/main" id="{0DEA3297-9087-4033-B549-BFC36CF8D813}"/>
+                <a16:creationId xmlns:a16="http://schemas.microsoft.com/office/drawing/2014/main" id="{34F55ADF-5C85-4919-B457-5AC20A931B49}"/>
               </a:ext>
             </a:extLst>
           </p:cNvPr>
@@ -3208,14 +3208,14 @@
           <a:lstStyle xmlns:a="http://schemas.openxmlformats.org/drawingml/2006/main"/>
           <a:p xmlns:a="http://schemas.openxmlformats.org/drawingml/2006/main">
             <a:pPr algn="ctr">
-              <a:defRPr sz="1950" b="1">
-                <a:solidFill>
-                  <a:srgbClr val="102A43"/>
-                </a:solidFill>
-              </a:defRPr>
-            </a:pPr>
-            <a:r>
-              <a:rPr sz="1950" b="1">
+              <a:defRPr sz="1695" b="1">
+                <a:solidFill>
+                  <a:srgbClr val="102A43"/>
+                </a:solidFill>
+              </a:defRPr>
+            </a:pPr>
+            <a:r>
+              <a:rPr sz="1695" b="1">
                 <a:solidFill>
                   <a:srgbClr val="102A43"/>
                 </a:solidFill>
@@ -3230,7 +3230,7 @@
           <p:cNvPr id="48" name="takeaway-evidence">
             <a:extLst xmlns:a="http://schemas.openxmlformats.org/drawingml/2006/main">
               <a:ext uri="{FF2B5EF4-FFF2-40B4-BE49-F238E27FC236}">
-                <a16:creationId xmlns:a16="http://schemas.microsoft.com/office/drawing/2014/main" id="{D01E18F0-D12C-47D4-A716-13F5B5E29C44}"/>
+                <a16:creationId xmlns:a16="http://schemas.microsoft.com/office/drawing/2014/main" id="{A7113108-FA2D-46DF-9727-CFCB269064BB}"/>
               </a:ext>
             </a:extLst>
           </p:cNvPr>
@@ -3258,14 +3258,14 @@
           <a:lstStyle xmlns:a="http://schemas.openxmlformats.org/drawingml/2006/main"/>
           <a:p xmlns:a="http://schemas.openxmlformats.org/drawingml/2006/main">
             <a:pPr>
-              <a:defRPr sz="1650" i="1">
+              <a:defRPr sz="1324">
                 <a:solidFill>
                   <a:srgbClr val="2C8C99"/>
                 </a:solidFill>
               </a:defRPr>
             </a:pPr>
             <a:r>
-              <a:rPr sz="1650" i="1">
+              <a:rPr sz="1324">
                 <a:solidFill>
                   <a:srgbClr val="2C8C99"/>
                 </a:solidFill>
@@ -3280,7 +3280,7 @@
           <p:cNvPr id="49" name="figure-two-heading-title">
             <a:extLst xmlns:a="http://schemas.openxmlformats.org/drawingml/2006/main">
               <a:ext uri="{FF2B5EF4-FFF2-40B4-BE49-F238E27FC236}">
-                <a16:creationId xmlns:a16="http://schemas.microsoft.com/office/drawing/2014/main" id="{8C7883E6-FD6E-4169-95DC-BC8521D38F52}"/>
+                <a16:creationId xmlns:a16="http://schemas.microsoft.com/office/drawing/2014/main" id="{73888FDC-4B37-4C81-96D8-7DF2E6703EBC}"/>
               </a:ext>
             </a:extLst>
           </p:cNvPr>
@@ -3308,19 +3308,19 @@
           <a:lstStyle xmlns:a="http://schemas.openxmlformats.org/drawingml/2006/main"/>
           <a:p xmlns:a="http://schemas.openxmlformats.org/drawingml/2006/main">
             <a:pPr>
-              <a:defRPr sz="2850" b="1">
+              <a:defRPr sz="2542" b="1">
                 <a:solidFill>
                   <a:srgbClr val="0F5F73"/>
                 </a:solidFill>
               </a:defRPr>
             </a:pPr>
             <a:r>
-              <a:rPr sz="2850" b="1">
+              <a:rPr sz="2542" b="1">
                 <a:solidFill>
                   <a:srgbClr val="0F5F73"/>
                 </a:solidFill>
               </a:rPr>
-              <a:t>Primary performance</a:t>
+              <a:t>Primary result</a:t>
             </a:r>
           </a:p>
         </p:txBody>
@@ -3330,7 +3330,7 @@
           <p:cNvPr id="50" name="figure-two-heading-rule">
             <a:extLst xmlns:a="http://schemas.openxmlformats.org/drawingml/2006/main">
               <a:ext uri="{FF2B5EF4-FFF2-40B4-BE49-F238E27FC236}">
-                <a16:creationId xmlns:a16="http://schemas.microsoft.com/office/drawing/2014/main" id="{E6117133-7509-4867-AF73-45C4CE102148}"/>
+                <a16:creationId xmlns:a16="http://schemas.microsoft.com/office/drawing/2014/main" id="{13C00CE2-B3B1-4CCE-B905-1BE51E5D5BBB}"/>
               </a:ext>
             </a:extLst>
           </p:cNvPr>
@@ -3363,7 +3363,7 @@
           <p:cNvPr id="51" name="figure-two-frame">
             <a:extLst xmlns:a="http://schemas.openxmlformats.org/drawingml/2006/main">
               <a:ext uri="{FF2B5EF4-FFF2-40B4-BE49-F238E27FC236}">
-                <a16:creationId xmlns:a16="http://schemas.microsoft.com/office/drawing/2014/main" id="{4FE5DF13-1FD4-4D84-BAEB-87439715FBC9}"/>
+                <a16:creationId xmlns:a16="http://schemas.microsoft.com/office/drawing/2014/main" id="{C2EFD8A1-2E4A-44D4-B9B6-5D65E1CF7303}"/>
               </a:ext>
             </a:extLst>
           </p:cNvPr>
@@ -3398,7 +3398,7 @@
           <p:cNvPr id="52" name="figure-two-placeholder">
             <a:extLst xmlns:a="http://schemas.openxmlformats.org/drawingml/2006/main">
               <a:ext uri="{FF2B5EF4-FFF2-40B4-BE49-F238E27FC236}">
-                <a16:creationId xmlns:a16="http://schemas.microsoft.com/office/drawing/2014/main" id="{F2F2A302-727A-4459-AA5A-CA829FFD7599}"/>
+                <a16:creationId xmlns:a16="http://schemas.microsoft.com/office/drawing/2014/main" id="{4032D2FB-B158-4D45-8DC9-AE8B23B6632B}"/>
               </a:ext>
             </a:extLst>
           </p:cNvPr>
@@ -3433,7 +3433,7 @@
           <p:cNvPr id="53" name="figure-two-placeholder-label">
             <a:extLst xmlns:a="http://schemas.openxmlformats.org/drawingml/2006/main">
               <a:ext uri="{FF2B5EF4-FFF2-40B4-BE49-F238E27FC236}">
-                <a16:creationId xmlns:a16="http://schemas.microsoft.com/office/drawing/2014/main" id="{2678E941-BEAF-4E44-A4C1-588E9E80E80D}"/>
+                <a16:creationId xmlns:a16="http://schemas.microsoft.com/office/drawing/2014/main" id="{6DDEFC75-9E53-4173-9FCF-A8BCACD104A1}"/>
               </a:ext>
             </a:extLst>
           </p:cNvPr>
@@ -3461,19 +3461,19 @@
           <a:lstStyle xmlns:a="http://schemas.openxmlformats.org/drawingml/2006/main"/>
           <a:p xmlns:a="http://schemas.openxmlformats.org/drawingml/2006/main">
             <a:pPr algn="ctr">
-              <a:defRPr sz="2100" b="1">
+              <a:defRPr sz="1907" b="1">
                 <a:solidFill>
                   <a:srgbClr val="2C8C99"/>
                 </a:solidFill>
               </a:defRPr>
             </a:pPr>
             <a:r>
-              <a:rPr sz="2100" b="1">
+              <a:rPr sz="1907" b="1">
                 <a:solidFill>
                   <a:srgbClr val="2C8C99"/>
                 </a:solidFill>
               </a:rPr>
-              <a:t>SCIENTIFIC FIGURE</a:t>
+              <a:t>scientific figure</a:t>
             </a:r>
           </a:p>
         </p:txBody>
@@ -3483,7 +3483,7 @@
           <p:cNvPr id="54" name="figure-two-caption">
             <a:extLst xmlns:a="http://schemas.openxmlformats.org/drawingml/2006/main">
               <a:ext uri="{FF2B5EF4-FFF2-40B4-BE49-F238E27FC236}">
-                <a16:creationId xmlns:a16="http://schemas.microsoft.com/office/drawing/2014/main" id="{8D3C8DDF-AF00-4532-8117-F87E1E24846B}"/>
+                <a16:creationId xmlns:a16="http://schemas.microsoft.com/office/drawing/2014/main" id="{823745CA-B9B4-425B-BD60-50B2CA4BB694}"/>
               </a:ext>
             </a:extLst>
           </p:cNvPr>
@@ -3495,7 +3495,7 @@
         <p:spPr>
           <a:xfrm xmlns:a="http://schemas.openxmlformats.org/drawingml/2006/main">
             <a:off x="9729480" y="15188495"/>
-            <a:ext cx="9345422" cy="282514"/>
+            <a:ext cx="9345422" cy="221975"/>
           </a:xfrm>
           <a:prstGeom xmlns:a="http://schemas.openxmlformats.org/drawingml/2006/main" prst="rect">
             <a:avLst/>
@@ -3511,19 +3511,19 @@
           <a:lstStyle xmlns:a="http://schemas.openxmlformats.org/drawingml/2006/main"/>
           <a:p xmlns:a="http://schemas.openxmlformats.org/drawingml/2006/main">
             <a:pPr>
-              <a:defRPr sz="2205" b="1">
-                <a:solidFill>
-                  <a:srgbClr val="102A43"/>
-                </a:solidFill>
-              </a:defRPr>
-            </a:pPr>
-            <a:r>
-              <a:rPr sz="2205" b="1">
-                <a:solidFill>
-                  <a:srgbClr val="102A43"/>
-                </a:solidFill>
-              </a:rPr>
-              <a:t>Figure caption</a:t>
+              <a:defRPr sz="1589" b="1">
+                <a:solidFill>
+                  <a:srgbClr val="102A43"/>
+                </a:solidFill>
+              </a:defRPr>
+            </a:pPr>
+            <a:r>
+              <a:rPr sz="1589" b="1">
+                <a:solidFill>
+                  <a:srgbClr val="102A43"/>
+                </a:solidFill>
+              </a:rPr>
+              <a:t>Scientific Figure caption</a:t>
             </a:r>
           </a:p>
         </p:txBody>
@@ -3533,18 +3533,18 @@
           <p:cNvPr id="55" name="figure-two-source">
             <a:extLst xmlns:a="http://schemas.openxmlformats.org/drawingml/2006/main">
               <a:ext uri="{FF2B5EF4-FFF2-40B4-BE49-F238E27FC236}">
-                <a16:creationId xmlns:a16="http://schemas.microsoft.com/office/drawing/2014/main" id="{1EBB2007-66F3-408E-8250-BEFEAAFB1C54}"/>
-              </a:ext>
-            </a:extLst>
-          </p:cNvPr>
-          <p:cNvSpPr>
-            <a:spLocks xmlns:a="http://schemas.openxmlformats.org/drawingml/2006/main" noGrp="1"/>
-          </p:cNvSpPr>
-          <p:nvPr/>
-        </p:nvSpPr>
-        <p:spPr>
-          <a:xfrm xmlns:a="http://schemas.openxmlformats.org/drawingml/2006/main">
-            <a:off x="9729480" y="15410470"/>
+                <a16:creationId xmlns:a16="http://schemas.microsoft.com/office/drawing/2014/main" id="{8DC08A26-7BE1-4EF4-989B-2E3476CDBF5C}"/>
+              </a:ext>
+            </a:extLst>
+          </p:cNvPr>
+          <p:cNvSpPr>
+            <a:spLocks xmlns:a="http://schemas.openxmlformats.org/drawingml/2006/main" noGrp="1"/>
+          </p:cNvSpPr>
+          <p:nvPr/>
+        </p:nvSpPr>
+        <p:spPr>
+          <a:xfrm xmlns:a="http://schemas.openxmlformats.org/drawingml/2006/main">
+            <a:off x="9729480" y="15417197"/>
             <a:ext cx="9345422" cy="255608"/>
           </a:xfrm>
           <a:prstGeom xmlns:a="http://schemas.openxmlformats.org/drawingml/2006/main" prst="rect">
@@ -3561,14 +3561,14 @@
           <a:lstStyle xmlns:a="http://schemas.openxmlformats.org/drawingml/2006/main"/>
           <a:p xmlns:a="http://schemas.openxmlformats.org/drawingml/2006/main">
             <a:pPr>
-              <a:defRPr sz="1650" i="1">
+              <a:defRPr sz="1324">
                 <a:solidFill>
                   <a:srgbClr val="2C8C99"/>
                 </a:solidFill>
               </a:defRPr>
             </a:pPr>
             <a:r>
-              <a:rPr sz="1650" i="1">
+              <a:rPr sz="1324">
                 <a:solidFill>
                   <a:srgbClr val="2C8C99"/>
                 </a:solidFill>
@@ -3583,7 +3583,7 @@
           <p:cNvPr id="56" name="validation-heading-title">
             <a:extLst xmlns:a="http://schemas.openxmlformats.org/drawingml/2006/main">
               <a:ext uri="{FF2B5EF4-FFF2-40B4-BE49-F238E27FC236}">
-                <a16:creationId xmlns:a16="http://schemas.microsoft.com/office/drawing/2014/main" id="{B4FD3903-00E8-471E-818B-72AC88E97F26}"/>
+                <a16:creationId xmlns:a16="http://schemas.microsoft.com/office/drawing/2014/main" id="{7520BBA7-7765-497A-8BFF-CC7CFF110D6E}"/>
               </a:ext>
             </a:extLst>
           </p:cNvPr>
@@ -3611,19 +3611,19 @@
           <a:lstStyle xmlns:a="http://schemas.openxmlformats.org/drawingml/2006/main"/>
           <a:p xmlns:a="http://schemas.openxmlformats.org/drawingml/2006/main">
             <a:pPr>
-              <a:defRPr sz="2850" b="1">
+              <a:defRPr sz="2542" b="1">
                 <a:solidFill>
                   <a:srgbClr val="0F5F73"/>
                 </a:solidFill>
               </a:defRPr>
             </a:pPr>
             <a:r>
-              <a:rPr sz="2850" b="1">
+              <a:rPr sz="2542" b="1">
                 <a:solidFill>
                   <a:srgbClr val="0F5F73"/>
                 </a:solidFill>
               </a:rPr>
-              <a:t>Independent and external validation</a:t>
+              <a:t>Robustness and validation</a:t>
             </a:r>
           </a:p>
         </p:txBody>
@@ -3633,7 +3633,7 @@
           <p:cNvPr id="57" name="validation-heading-rule">
             <a:extLst xmlns:a="http://schemas.openxmlformats.org/drawingml/2006/main">
               <a:ext uri="{FF2B5EF4-FFF2-40B4-BE49-F238E27FC236}">
-                <a16:creationId xmlns:a16="http://schemas.microsoft.com/office/drawing/2014/main" id="{7122245A-3641-4FD3-846A-05DEE10873B4}"/>
+                <a16:creationId xmlns:a16="http://schemas.microsoft.com/office/drawing/2014/main" id="{F4141BD0-45FE-4318-AF76-3C263EC3E7DA}"/>
               </a:ext>
             </a:extLst>
           </p:cNvPr>
@@ -3666,7 +3666,7 @@
           <p:cNvPr id="58" name="validation-panel">
             <a:extLst xmlns:a="http://schemas.openxmlformats.org/drawingml/2006/main">
               <a:ext uri="{FF2B5EF4-FFF2-40B4-BE49-F238E27FC236}">
-                <a16:creationId xmlns:a16="http://schemas.microsoft.com/office/drawing/2014/main" id="{0FAEB380-59D8-4A43-9ED6-E13645047B92}"/>
+                <a16:creationId xmlns:a16="http://schemas.microsoft.com/office/drawing/2014/main" id="{20A48C12-0321-47C0-8595-F06B0B681667}"/>
               </a:ext>
             </a:extLst>
           </p:cNvPr>
@@ -3701,7 +3701,7 @@
           <p:cNvPr id="59" name="validation">
             <a:extLst xmlns:a="http://schemas.openxmlformats.org/drawingml/2006/main">
               <a:ext uri="{FF2B5EF4-FFF2-40B4-BE49-F238E27FC236}">
-                <a16:creationId xmlns:a16="http://schemas.microsoft.com/office/drawing/2014/main" id="{360C3A68-D83D-4D85-87E9-C732571B4099}"/>
+                <a16:creationId xmlns:a16="http://schemas.microsoft.com/office/drawing/2014/main" id="{B69004D1-2F99-47A1-8587-BA319124150F}"/>
               </a:ext>
             </a:extLst>
           </p:cNvPr>
@@ -3729,14 +3729,14 @@
           <a:lstStyle xmlns:a="http://schemas.openxmlformats.org/drawingml/2006/main"/>
           <a:p xmlns:a="http://schemas.openxmlformats.org/drawingml/2006/main">
             <a:pPr>
-              <a:defRPr sz="2805">
-                <a:solidFill>
-                  <a:srgbClr val="102A43"/>
-                </a:solidFill>
-              </a:defRPr>
-            </a:pPr>
-            <a:r>
-              <a:rPr sz="2805">
+              <a:defRPr sz="2013">
+                <a:solidFill>
+                  <a:srgbClr val="102A43"/>
+                </a:solidFill>
+              </a:defRPr>
+            </a:pPr>
+            <a:r>
+              <a:rPr sz="2013">
                 <a:solidFill>
                   <a:srgbClr val="102A43"/>
                 </a:solidFill>
@@ -3746,14 +3746,14 @@
           </a:p>
           <a:p xmlns:a="http://schemas.openxmlformats.org/drawingml/2006/main">
             <a:pPr>
-              <a:defRPr sz="2805">
-                <a:solidFill>
-                  <a:srgbClr val="102A43"/>
-                </a:solidFill>
-              </a:defRPr>
-            </a:pPr>
-            <a:r>
-              <a:rPr sz="2805">
+              <a:defRPr sz="2013">
+                <a:solidFill>
+                  <a:srgbClr val="102A43"/>
+                </a:solidFill>
+              </a:defRPr>
+            </a:pPr>
+            <a:r>
+              <a:rPr sz="2013">
                 <a:solidFill>
                   <a:srgbClr val="102A43"/>
                 </a:solidFill>
@@ -3763,31 +3763,31 @@
           </a:p>
           <a:p xmlns:a="http://schemas.openxmlformats.org/drawingml/2006/main">
             <a:pPr>
-              <a:defRPr sz="2805">
-                <a:solidFill>
-                  <a:srgbClr val="102A43"/>
-                </a:solidFill>
-              </a:defRPr>
-            </a:pPr>
-            <a:r>
-              <a:rPr sz="2805">
-                <a:solidFill>
-                  <a:srgbClr val="102A43"/>
-                </a:solidFill>
-              </a:rPr>
-              <a:t>• Negative or inconsistent findings</a:t>
+              <a:defRPr sz="2013">
+                <a:solidFill>
+                  <a:srgbClr val="102A43"/>
+                </a:solidFill>
+              </a:defRPr>
+            </a:pPr>
+            <a:r>
+              <a:rPr sz="2013">
+                <a:solidFill>
+                  <a:srgbClr val="102A43"/>
+                </a:solidFill>
+              </a:rPr>
+              <a:t>• Negative findings</a:t>
             </a:r>
           </a:p>
           <a:p xmlns:a="http://schemas.openxmlformats.org/drawingml/2006/main">
             <a:pPr>
-              <a:defRPr sz="2805">
-                <a:solidFill>
-                  <a:srgbClr val="102A43"/>
-                </a:solidFill>
-              </a:defRPr>
-            </a:pPr>
-            <a:r>
-              <a:rPr sz="2805">
+              <a:defRPr sz="2013">
+                <a:solidFill>
+                  <a:srgbClr val="102A43"/>
+                </a:solidFill>
+              </a:defRPr>
+            </a:pPr>
+            <a:r>
+              <a:rPr sz="2013">
                 <a:solidFill>
                   <a:srgbClr val="102A43"/>
                 </a:solidFill>
@@ -3802,7 +3802,7 @@
           <p:cNvPr id="60" name="validation-evidence">
             <a:extLst xmlns:a="http://schemas.openxmlformats.org/drawingml/2006/main">
               <a:ext uri="{FF2B5EF4-FFF2-40B4-BE49-F238E27FC236}">
-                <a16:creationId xmlns:a16="http://schemas.microsoft.com/office/drawing/2014/main" id="{49FF198D-7615-436D-A585-E4F5921318C4}"/>
+                <a16:creationId xmlns:a16="http://schemas.microsoft.com/office/drawing/2014/main" id="{BC18AB4E-916A-4C1A-A032-4EC55B1CD561}"/>
               </a:ext>
             </a:extLst>
           </p:cNvPr>
@@ -3830,14 +3830,14 @@
           <a:lstStyle xmlns:a="http://schemas.openxmlformats.org/drawingml/2006/main"/>
           <a:p xmlns:a="http://schemas.openxmlformats.org/drawingml/2006/main">
             <a:pPr>
-              <a:defRPr sz="1650" i="1">
+              <a:defRPr sz="1324">
                 <a:solidFill>
                   <a:srgbClr val="2C8C99"/>
                 </a:solidFill>
               </a:defRPr>
             </a:pPr>
             <a:r>
-              <a:rPr sz="1650" i="1">
+              <a:rPr sz="1324">
                 <a:solidFill>
                   <a:srgbClr val="2C8C99"/>
                 </a:solidFill>
@@ -3852,7 +3852,7 @@
           <p:cNvPr id="61" name="performance-strip">
             <a:extLst xmlns:a="http://schemas.openxmlformats.org/drawingml/2006/main">
               <a:ext uri="{FF2B5EF4-FFF2-40B4-BE49-F238E27FC236}">
-                <a16:creationId xmlns:a16="http://schemas.microsoft.com/office/drawing/2014/main" id="{C96440E8-2498-4E5B-87B7-3104096159FB}"/>
+                <a16:creationId xmlns:a16="http://schemas.microsoft.com/office/drawing/2014/main" id="{EBE8C4DB-E163-486E-81D3-090F07363351}"/>
               </a:ext>
             </a:extLst>
           </p:cNvPr>
@@ -3885,7 +3885,7 @@
           <p:cNvPr id="62" name="performance-strip-text">
             <a:extLst xmlns:a="http://schemas.openxmlformats.org/drawingml/2006/main">
               <a:ext uri="{FF2B5EF4-FFF2-40B4-BE49-F238E27FC236}">
-                <a16:creationId xmlns:a16="http://schemas.microsoft.com/office/drawing/2014/main" id="{69AE8AB0-268A-4EC7-8FF2-2A86486EBAD6}"/>
+                <a16:creationId xmlns:a16="http://schemas.microsoft.com/office/drawing/2014/main" id="{0A0545D6-E30B-4491-B598-C8451BC9B8D4}"/>
               </a:ext>
             </a:extLst>
           </p:cNvPr>
@@ -3913,19 +3913,19 @@
           <a:lstStyle xmlns:a="http://schemas.openxmlformats.org/drawingml/2006/main"/>
           <a:p xmlns:a="http://schemas.openxmlformats.org/drawingml/2006/main">
             <a:pPr algn="ctr">
-              <a:defRPr sz="2100" b="1">
+              <a:defRPr sz="1801" b="1">
                 <a:solidFill>
                   <a:srgbClr val="FFFFFF"/>
                 </a:solidFill>
               </a:defRPr>
             </a:pPr>
             <a:r>
-              <a:rPr sz="2100" b="1">
+              <a:rPr sz="1801" b="1">
                 <a:solidFill>
                   <a:srgbClr val="FFFFFF"/>
                 </a:solidFill>
               </a:rPr>
-              <a:t>Primary performance statistic or calibrated model comparison</a:t>
+              <a:t>Primary estimate · uncertainty · validation</a:t>
             </a:r>
           </a:p>
         </p:txBody>
@@ -3935,7 +3935,7 @@
           <p:cNvPr id="63" name="biology-heading-title">
             <a:extLst xmlns:a="http://schemas.openxmlformats.org/drawingml/2006/main">
               <a:ext uri="{FF2B5EF4-FFF2-40B4-BE49-F238E27FC236}">
-                <a16:creationId xmlns:a16="http://schemas.microsoft.com/office/drawing/2014/main" id="{963F5E93-02E7-4BAF-A79D-14B17E38047F}"/>
+                <a16:creationId xmlns:a16="http://schemas.microsoft.com/office/drawing/2014/main" id="{96CD318A-ED16-447A-A65D-B41C428DD5FD}"/>
               </a:ext>
             </a:extLst>
           </p:cNvPr>
@@ -3963,14 +3963,14 @@
           <a:lstStyle xmlns:a="http://schemas.openxmlformats.org/drawingml/2006/main"/>
           <a:p xmlns:a="http://schemas.openxmlformats.org/drawingml/2006/main">
             <a:pPr>
-              <a:defRPr sz="2850" b="1">
+              <a:defRPr sz="2542" b="1">
                 <a:solidFill>
                   <a:srgbClr val="0F5F73"/>
                 </a:solidFill>
               </a:defRPr>
             </a:pPr>
             <a:r>
-              <a:rPr sz="2850" b="1">
+              <a:rPr sz="2542" b="1">
                 <a:solidFill>
                   <a:srgbClr val="0F5F73"/>
                 </a:solidFill>
@@ -3985,7 +3985,7 @@
           <p:cNvPr id="64" name="biology-heading-rule">
             <a:extLst xmlns:a="http://schemas.openxmlformats.org/drawingml/2006/main">
               <a:ext uri="{FF2B5EF4-FFF2-40B4-BE49-F238E27FC236}">
-                <a16:creationId xmlns:a16="http://schemas.microsoft.com/office/drawing/2014/main" id="{8593AF15-FB6F-4497-919B-457F4C5F5DCD}"/>
+                <a16:creationId xmlns:a16="http://schemas.microsoft.com/office/drawing/2014/main" id="{EBA76B7D-5008-4984-BE86-17D3550E2314}"/>
               </a:ext>
             </a:extLst>
           </p:cNvPr>
@@ -4018,7 +4018,7 @@
           <p:cNvPr id="65" name="biology-1-value">
             <a:extLst xmlns:a="http://schemas.openxmlformats.org/drawingml/2006/main">
               <a:ext uri="{FF2B5EF4-FFF2-40B4-BE49-F238E27FC236}">
-                <a16:creationId xmlns:a16="http://schemas.microsoft.com/office/drawing/2014/main" id="{0186CD8E-4404-4CF3-8466-C4ED65E5E0FA}"/>
+                <a16:creationId xmlns:a16="http://schemas.microsoft.com/office/drawing/2014/main" id="{EB6324CA-F6B4-413E-B807-987AFFA9D79D}"/>
               </a:ext>
             </a:extLst>
           </p:cNvPr>
@@ -4068,18 +4068,18 @@
           <p:cNvPr id="66" name="biology-1-label">
             <a:extLst xmlns:a="http://schemas.openxmlformats.org/drawingml/2006/main">
               <a:ext uri="{FF2B5EF4-FFF2-40B4-BE49-F238E27FC236}">
-                <a16:creationId xmlns:a16="http://schemas.microsoft.com/office/drawing/2014/main" id="{B1AC63D3-9CA8-4EE0-981D-17C31C56B9FD}"/>
-              </a:ext>
-            </a:extLst>
-          </p:cNvPr>
-          <p:cNvSpPr>
-            <a:spLocks xmlns:a="http://schemas.openxmlformats.org/drawingml/2006/main" noGrp="1"/>
-          </p:cNvSpPr>
-          <p:nvPr/>
-        </p:nvSpPr>
-        <p:spPr>
-          <a:xfrm xmlns:a="http://schemas.openxmlformats.org/drawingml/2006/main">
-            <a:off x="19640883" y="5192878"/>
+                <a16:creationId xmlns:a16="http://schemas.microsoft.com/office/drawing/2014/main" id="{60C449CA-A146-4450-A172-C04C54A35155}"/>
+              </a:ext>
+            </a:extLst>
+          </p:cNvPr>
+          <p:cNvSpPr>
+            <a:spLocks xmlns:a="http://schemas.openxmlformats.org/drawingml/2006/main" noGrp="1"/>
+          </p:cNvSpPr>
+          <p:nvPr/>
+        </p:nvSpPr>
+        <p:spPr>
+          <a:xfrm xmlns:a="http://schemas.openxmlformats.org/drawingml/2006/main">
+            <a:off x="19640883" y="5165972"/>
             <a:ext cx="2829904" cy="591934"/>
           </a:xfrm>
           <a:prstGeom xmlns:a="http://schemas.openxmlformats.org/drawingml/2006/main" prst="rect">
@@ -4096,19 +4096,19 @@
           <a:lstStyle xmlns:a="http://schemas.openxmlformats.org/drawingml/2006/main"/>
           <a:p xmlns:a="http://schemas.openxmlformats.org/drawingml/2006/main">
             <a:pPr>
-              <a:defRPr sz="1800" b="1">
-                <a:solidFill>
-                  <a:srgbClr val="102A43"/>
-                </a:solidFill>
-              </a:defRPr>
-            </a:pPr>
-            <a:r>
-              <a:rPr sz="1800" b="1">
-                <a:solidFill>
-                  <a:srgbClr val="102A43"/>
-                </a:solidFill>
-              </a:rPr>
-              <a:t>program or pathway</a:t>
+              <a:defRPr sz="1642" b="1">
+                <a:solidFill>
+                  <a:srgbClr val="102A43"/>
+                </a:solidFill>
+              </a:defRPr>
+            </a:pPr>
+            <a:r>
+              <a:rPr sz="1642" b="1">
+                <a:solidFill>
+                  <a:srgbClr val="102A43"/>
+                </a:solidFill>
+              </a:rPr>
+              <a:t>primary estimate</a:t>
             </a:r>
           </a:p>
         </p:txBody>
@@ -4118,7 +4118,7 @@
           <p:cNvPr id="67" name="biology-2-value">
             <a:extLst xmlns:a="http://schemas.openxmlformats.org/drawingml/2006/main">
               <a:ext uri="{FF2B5EF4-FFF2-40B4-BE49-F238E27FC236}">
-                <a16:creationId xmlns:a16="http://schemas.microsoft.com/office/drawing/2014/main" id="{36114A16-F0BA-4AB1-B403-3CFC0BABA1BA}"/>
+                <a16:creationId xmlns:a16="http://schemas.microsoft.com/office/drawing/2014/main" id="{9E4FDA42-8023-4A28-935E-7CF82DEC2867}"/>
               </a:ext>
             </a:extLst>
           </p:cNvPr>
@@ -4158,7 +4158,7 @@
                   <a:srgbClr val="2C8C99"/>
                 </a:solidFill>
               </a:rPr>
-              <a:t>Effect</a:t>
+              <a:t>95% CI</a:t>
             </a:r>
           </a:p>
         </p:txBody>
@@ -4168,18 +4168,18 @@
           <p:cNvPr id="68" name="biology-2-label">
             <a:extLst xmlns:a="http://schemas.openxmlformats.org/drawingml/2006/main">
               <a:ext uri="{FF2B5EF4-FFF2-40B4-BE49-F238E27FC236}">
-                <a16:creationId xmlns:a16="http://schemas.microsoft.com/office/drawing/2014/main" id="{233B5F72-853D-45B8-A651-0189734C0C52}"/>
-              </a:ext>
-            </a:extLst>
-          </p:cNvPr>
-          <p:cNvSpPr>
-            <a:spLocks xmlns:a="http://schemas.openxmlformats.org/drawingml/2006/main" noGrp="1"/>
-          </p:cNvSpPr>
-          <p:nvPr/>
-        </p:nvSpPr>
-        <p:spPr>
-          <a:xfrm xmlns:a="http://schemas.openxmlformats.org/drawingml/2006/main">
-            <a:off x="22841370" y="5192878"/>
+                <a16:creationId xmlns:a16="http://schemas.microsoft.com/office/drawing/2014/main" id="{8A61C8F5-50C5-4F50-B195-BB82711A5297}"/>
+              </a:ext>
+            </a:extLst>
+          </p:cNvPr>
+          <p:cNvSpPr>
+            <a:spLocks xmlns:a="http://schemas.openxmlformats.org/drawingml/2006/main" noGrp="1"/>
+          </p:cNvSpPr>
+          <p:nvPr/>
+        </p:nvSpPr>
+        <p:spPr>
+          <a:xfrm xmlns:a="http://schemas.openxmlformats.org/drawingml/2006/main">
+            <a:off x="22841370" y="5165972"/>
             <a:ext cx="2829904" cy="591934"/>
           </a:xfrm>
           <a:prstGeom xmlns:a="http://schemas.openxmlformats.org/drawingml/2006/main" prst="rect">
@@ -4196,19 +4196,19 @@
           <a:lstStyle xmlns:a="http://schemas.openxmlformats.org/drawingml/2006/main"/>
           <a:p xmlns:a="http://schemas.openxmlformats.org/drawingml/2006/main">
             <a:pPr>
-              <a:defRPr sz="1800" b="1">
-                <a:solidFill>
-                  <a:srgbClr val="102A43"/>
-                </a:solidFill>
-              </a:defRPr>
-            </a:pPr>
-            <a:r>
-              <a:rPr sz="1800" b="1">
-                <a:solidFill>
-                  <a:srgbClr val="102A43"/>
-                </a:solidFill>
-              </a:rPr>
-              <a:t>program or pathway</a:t>
+              <a:defRPr sz="1642" b="1">
+                <a:solidFill>
+                  <a:srgbClr val="102A43"/>
+                </a:solidFill>
+              </a:defRPr>
+            </a:pPr>
+            <a:r>
+              <a:rPr sz="1642" b="1">
+                <a:solidFill>
+                  <a:srgbClr val="102A43"/>
+                </a:solidFill>
+              </a:rPr>
+              <a:t>uncertainty</a:t>
             </a:r>
           </a:p>
         </p:txBody>
@@ -4218,7 +4218,7 @@
           <p:cNvPr id="69" name="biology-3-value">
             <a:extLst xmlns:a="http://schemas.openxmlformats.org/drawingml/2006/main">
               <a:ext uri="{FF2B5EF4-FFF2-40B4-BE49-F238E27FC236}">
-                <a16:creationId xmlns:a16="http://schemas.microsoft.com/office/drawing/2014/main" id="{D89A4F05-DF68-4A37-BA48-1BB5BE98EC85}"/>
+                <a16:creationId xmlns:a16="http://schemas.microsoft.com/office/drawing/2014/main" id="{9A664E0B-8379-48C1-9226-69226893B7E2}"/>
               </a:ext>
             </a:extLst>
           </p:cNvPr>
@@ -4258,7 +4258,7 @@
                   <a:srgbClr val="E8B44C"/>
                 </a:solidFill>
               </a:rPr>
-              <a:t>Effect</a:t>
+              <a:t>P</a:t>
             </a:r>
           </a:p>
         </p:txBody>
@@ -4268,18 +4268,18 @@
           <p:cNvPr id="70" name="biology-3-label">
             <a:extLst xmlns:a="http://schemas.openxmlformats.org/drawingml/2006/main">
               <a:ext uri="{FF2B5EF4-FFF2-40B4-BE49-F238E27FC236}">
-                <a16:creationId xmlns:a16="http://schemas.microsoft.com/office/drawing/2014/main" id="{53280CB1-B625-4F41-9411-2673A4E7A239}"/>
-              </a:ext>
-            </a:extLst>
-          </p:cNvPr>
-          <p:cNvSpPr>
-            <a:spLocks xmlns:a="http://schemas.openxmlformats.org/drawingml/2006/main" noGrp="1"/>
-          </p:cNvSpPr>
-          <p:nvPr/>
-        </p:nvSpPr>
-        <p:spPr>
-          <a:xfrm xmlns:a="http://schemas.openxmlformats.org/drawingml/2006/main">
-            <a:off x="26041857" y="5192878"/>
+                <a16:creationId xmlns:a16="http://schemas.microsoft.com/office/drawing/2014/main" id="{ABDCB4D0-6B73-40C5-A65D-714B40F3BC66}"/>
+              </a:ext>
+            </a:extLst>
+          </p:cNvPr>
+          <p:cNvSpPr>
+            <a:spLocks xmlns:a="http://schemas.openxmlformats.org/drawingml/2006/main" noGrp="1"/>
+          </p:cNvSpPr>
+          <p:nvPr/>
+        </p:nvSpPr>
+        <p:spPr>
+          <a:xfrm xmlns:a="http://schemas.openxmlformats.org/drawingml/2006/main">
+            <a:off x="26041857" y="5165972"/>
             <a:ext cx="2829904" cy="591934"/>
           </a:xfrm>
           <a:prstGeom xmlns:a="http://schemas.openxmlformats.org/drawingml/2006/main" prst="rect">
@@ -4296,19 +4296,19 @@
           <a:lstStyle xmlns:a="http://schemas.openxmlformats.org/drawingml/2006/main"/>
           <a:p xmlns:a="http://schemas.openxmlformats.org/drawingml/2006/main">
             <a:pPr>
-              <a:defRPr sz="1800" b="1">
-                <a:solidFill>
-                  <a:srgbClr val="102A43"/>
-                </a:solidFill>
-              </a:defRPr>
-            </a:pPr>
-            <a:r>
-              <a:rPr sz="1800" b="1">
-                <a:solidFill>
-                  <a:srgbClr val="102A43"/>
-                </a:solidFill>
-              </a:rPr>
-              <a:t>program or pathway</a:t>
+              <a:defRPr sz="1642" b="1">
+                <a:solidFill>
+                  <a:srgbClr val="102A43"/>
+                </a:solidFill>
+              </a:defRPr>
+            </a:pPr>
+            <a:r>
+              <a:rPr sz="1642" b="1">
+                <a:solidFill>
+                  <a:srgbClr val="102A43"/>
+                </a:solidFill>
+              </a:rPr>
+              <a:t>robustness</a:t>
             </a:r>
           </a:p>
         </p:txBody>
@@ -4318,7 +4318,7 @@
           <p:cNvPr id="71" name="biology-evidence">
             <a:extLst xmlns:a="http://schemas.openxmlformats.org/drawingml/2006/main">
               <a:ext uri="{FF2B5EF4-FFF2-40B4-BE49-F238E27FC236}">
-                <a16:creationId xmlns:a16="http://schemas.microsoft.com/office/drawing/2014/main" id="{8727FE57-C2B8-4714-8659-B9316D5709C0}"/>
+                <a16:creationId xmlns:a16="http://schemas.microsoft.com/office/drawing/2014/main" id="{42E4D70F-C38A-4CE4-9A9E-16F7C052B578}"/>
               </a:ext>
             </a:extLst>
           </p:cNvPr>
@@ -4346,19 +4346,19 @@
           <a:lstStyle xmlns:a="http://schemas.openxmlformats.org/drawingml/2006/main"/>
           <a:p xmlns:a="http://schemas.openxmlformats.org/drawingml/2006/main">
             <a:pPr>
-              <a:defRPr sz="1650" i="1">
+              <a:defRPr sz="1324">
                 <a:solidFill>
                   <a:srgbClr val="2C8C99"/>
                 </a:solidFill>
               </a:defRPr>
             </a:pPr>
             <a:r>
-              <a:rPr sz="1650" i="1">
+              <a:rPr sz="1324">
                 <a:solidFill>
                   <a:srgbClr val="2C8C99"/>
                 </a:solidFill>
               </a:rPr>
-              <a:t>Evidence: biological analysis</a:t>
+              <a:t>Evidence: supporting analysis</a:t>
             </a:r>
           </a:p>
         </p:txBody>
@@ -4368,7 +4368,7 @@
           <p:cNvPr id="72" name="figure-three-frame">
             <a:extLst xmlns:a="http://schemas.openxmlformats.org/drawingml/2006/main">
               <a:ext uri="{FF2B5EF4-FFF2-40B4-BE49-F238E27FC236}">
-                <a16:creationId xmlns:a16="http://schemas.microsoft.com/office/drawing/2014/main" id="{535E9FE7-2415-4049-A795-9192B75B8072}"/>
+                <a16:creationId xmlns:a16="http://schemas.microsoft.com/office/drawing/2014/main" id="{DB3E60FC-9F3C-46D2-B505-9EFDF4683702}"/>
               </a:ext>
             </a:extLst>
           </p:cNvPr>
@@ -4403,7 +4403,7 @@
           <p:cNvPr id="73" name="figure-three-placeholder">
             <a:extLst xmlns:a="http://schemas.openxmlformats.org/drawingml/2006/main">
               <a:ext uri="{FF2B5EF4-FFF2-40B4-BE49-F238E27FC236}">
-                <a16:creationId xmlns:a16="http://schemas.microsoft.com/office/drawing/2014/main" id="{9CE9E8ED-6B4C-455A-A9E5-B26E92E7557A}"/>
+                <a16:creationId xmlns:a16="http://schemas.microsoft.com/office/drawing/2014/main" id="{E681DA9E-2982-4F71-A1D4-4E996ABDDB8B}"/>
               </a:ext>
             </a:extLst>
           </p:cNvPr>
@@ -4438,7 +4438,7 @@
           <p:cNvPr id="74" name="figure-three-placeholder-label">
             <a:extLst xmlns:a="http://schemas.openxmlformats.org/drawingml/2006/main">
               <a:ext uri="{FF2B5EF4-FFF2-40B4-BE49-F238E27FC236}">
-                <a16:creationId xmlns:a16="http://schemas.microsoft.com/office/drawing/2014/main" id="{FBF830B1-25ED-4F49-A870-1466A0B5E0B8}"/>
+                <a16:creationId xmlns:a16="http://schemas.microsoft.com/office/drawing/2014/main" id="{E5013E81-578C-4B6D-9D2F-9578FC832C45}"/>
               </a:ext>
             </a:extLst>
           </p:cNvPr>
@@ -4466,19 +4466,19 @@
           <a:lstStyle xmlns:a="http://schemas.openxmlformats.org/drawingml/2006/main"/>
           <a:p xmlns:a="http://schemas.openxmlformats.org/drawingml/2006/main">
             <a:pPr algn="ctr">
-              <a:defRPr sz="2100" b="1">
+              <a:defRPr sz="1907" b="1">
                 <a:solidFill>
                   <a:srgbClr val="2C8C99"/>
                 </a:solidFill>
               </a:defRPr>
             </a:pPr>
             <a:r>
-              <a:rPr sz="2100" b="1">
+              <a:rPr sz="1907" b="1">
                 <a:solidFill>
                   <a:srgbClr val="2C8C99"/>
                 </a:solidFill>
               </a:rPr>
-              <a:t>SCIENTIFIC FIGURE</a:t>
+              <a:t>scientific figure</a:t>
             </a:r>
           </a:p>
         </p:txBody>
@@ -4488,7 +4488,7 @@
           <p:cNvPr id="75" name="figure-three-caption">
             <a:extLst xmlns:a="http://schemas.openxmlformats.org/drawingml/2006/main">
               <a:ext uri="{FF2B5EF4-FFF2-40B4-BE49-F238E27FC236}">
-                <a16:creationId xmlns:a16="http://schemas.microsoft.com/office/drawing/2014/main" id="{910F08B3-078A-4D74-9D0D-CF38E4F06308}"/>
+                <a16:creationId xmlns:a16="http://schemas.microsoft.com/office/drawing/2014/main" id="{44A13854-978E-4A2F-9745-3AECB91A4367}"/>
               </a:ext>
             </a:extLst>
           </p:cNvPr>
@@ -4500,7 +4500,7 @@
         <p:spPr>
           <a:xfrm xmlns:a="http://schemas.openxmlformats.org/drawingml/2006/main">
             <a:off x="19802592" y="10849886"/>
-            <a:ext cx="9372373" cy="282514"/>
+            <a:ext cx="9372373" cy="221975"/>
           </a:xfrm>
           <a:prstGeom xmlns:a="http://schemas.openxmlformats.org/drawingml/2006/main" prst="rect">
             <a:avLst/>
@@ -4516,19 +4516,19 @@
           <a:lstStyle xmlns:a="http://schemas.openxmlformats.org/drawingml/2006/main"/>
           <a:p xmlns:a="http://schemas.openxmlformats.org/drawingml/2006/main">
             <a:pPr>
-              <a:defRPr sz="2205" b="1">
-                <a:solidFill>
-                  <a:srgbClr val="102A43"/>
-                </a:solidFill>
-              </a:defRPr>
-            </a:pPr>
-            <a:r>
-              <a:rPr sz="2205" b="1">
-                <a:solidFill>
-                  <a:srgbClr val="102A43"/>
-                </a:solidFill>
-              </a:rPr>
-              <a:t>Figure caption</a:t>
+              <a:defRPr sz="1589" b="1">
+                <a:solidFill>
+                  <a:srgbClr val="102A43"/>
+                </a:solidFill>
+              </a:defRPr>
+            </a:pPr>
+            <a:r>
+              <a:rPr sz="1589" b="1">
+                <a:solidFill>
+                  <a:srgbClr val="102A43"/>
+                </a:solidFill>
+              </a:rPr>
+              <a:t>Scientific Figure caption</a:t>
             </a:r>
           </a:p>
         </p:txBody>
@@ -4538,18 +4538,18 @@
           <p:cNvPr id="76" name="figure-three-source">
             <a:extLst xmlns:a="http://schemas.openxmlformats.org/drawingml/2006/main">
               <a:ext uri="{FF2B5EF4-FFF2-40B4-BE49-F238E27FC236}">
-                <a16:creationId xmlns:a16="http://schemas.microsoft.com/office/drawing/2014/main" id="{DFC001D3-1AD6-4516-BB70-D6E44721B444}"/>
-              </a:ext>
-            </a:extLst>
-          </p:cNvPr>
-          <p:cNvSpPr>
-            <a:spLocks xmlns:a="http://schemas.openxmlformats.org/drawingml/2006/main" noGrp="1"/>
-          </p:cNvSpPr>
-          <p:nvPr/>
-        </p:nvSpPr>
-        <p:spPr>
-          <a:xfrm xmlns:a="http://schemas.openxmlformats.org/drawingml/2006/main">
-            <a:off x="19802592" y="11071861"/>
+                <a16:creationId xmlns:a16="http://schemas.microsoft.com/office/drawing/2014/main" id="{2A96BDE4-0738-45DB-A927-2E8D07CAA0F4}"/>
+              </a:ext>
+            </a:extLst>
+          </p:cNvPr>
+          <p:cNvSpPr>
+            <a:spLocks xmlns:a="http://schemas.openxmlformats.org/drawingml/2006/main" noGrp="1"/>
+          </p:cNvSpPr>
+          <p:nvPr/>
+        </p:nvSpPr>
+        <p:spPr>
+          <a:xfrm xmlns:a="http://schemas.openxmlformats.org/drawingml/2006/main">
+            <a:off x="19802592" y="11078588"/>
             <a:ext cx="9372373" cy="255608"/>
           </a:xfrm>
           <a:prstGeom xmlns:a="http://schemas.openxmlformats.org/drawingml/2006/main" prst="rect">
@@ -4566,14 +4566,14 @@
           <a:lstStyle xmlns:a="http://schemas.openxmlformats.org/drawingml/2006/main"/>
           <a:p xmlns:a="http://schemas.openxmlformats.org/drawingml/2006/main">
             <a:pPr>
-              <a:defRPr sz="1650" i="1">
+              <a:defRPr sz="1324">
                 <a:solidFill>
                   <a:srgbClr val="2C8C99"/>
                 </a:solidFill>
               </a:defRPr>
             </a:pPr>
             <a:r>
-              <a:rPr sz="1650" i="1">
+              <a:rPr sz="1324">
                 <a:solidFill>
                   <a:srgbClr val="2C8C99"/>
                 </a:solidFill>
@@ -4588,7 +4588,7 @@
           <p:cNvPr id="77" name="validation-visual-heading-title">
             <a:extLst xmlns:a="http://schemas.openxmlformats.org/drawingml/2006/main">
               <a:ext uri="{FF2B5EF4-FFF2-40B4-BE49-F238E27FC236}">
-                <a16:creationId xmlns:a16="http://schemas.microsoft.com/office/drawing/2014/main" id="{663C5D78-1D2F-41A7-9E28-58E4B1E51121}"/>
+                <a16:creationId xmlns:a16="http://schemas.microsoft.com/office/drawing/2014/main" id="{46B08629-9E2D-46F2-A835-F6B14E68AF13}"/>
               </a:ext>
             </a:extLst>
           </p:cNvPr>
@@ -4616,14 +4616,14 @@
           <a:lstStyle xmlns:a="http://schemas.openxmlformats.org/drawingml/2006/main"/>
           <a:p xmlns:a="http://schemas.openxmlformats.org/drawingml/2006/main">
             <a:pPr>
-              <a:defRPr sz="2850" b="1">
+              <a:defRPr sz="2542" b="1">
                 <a:solidFill>
                   <a:srgbClr val="0F5F73"/>
                 </a:solidFill>
               </a:defRPr>
             </a:pPr>
             <a:r>
-              <a:rPr sz="2850" b="1">
+              <a:rPr sz="2542" b="1">
                 <a:solidFill>
                   <a:srgbClr val="0F5F73"/>
                 </a:solidFill>
@@ -4638,7 +4638,7 @@
           <p:cNvPr id="78" name="validation-visual-heading-rule">
             <a:extLst xmlns:a="http://schemas.openxmlformats.org/drawingml/2006/main">
               <a:ext uri="{FF2B5EF4-FFF2-40B4-BE49-F238E27FC236}">
-                <a16:creationId xmlns:a16="http://schemas.microsoft.com/office/drawing/2014/main" id="{45D457A9-CD46-47F8-BE94-9E4A91803B91}"/>
+                <a16:creationId xmlns:a16="http://schemas.microsoft.com/office/drawing/2014/main" id="{32451DCF-DBB8-48E5-9575-8E3F717050EE}"/>
               </a:ext>
             </a:extLst>
           </p:cNvPr>
@@ -4671,7 +4671,7 @@
           <p:cNvPr id="79" name="figure-four-frame">
             <a:extLst xmlns:a="http://schemas.openxmlformats.org/drawingml/2006/main">
               <a:ext uri="{FF2B5EF4-FFF2-40B4-BE49-F238E27FC236}">
-                <a16:creationId xmlns:a16="http://schemas.microsoft.com/office/drawing/2014/main" id="{4DD7C11B-80F3-43B0-98B5-6B963D2E0C63}"/>
+                <a16:creationId xmlns:a16="http://schemas.microsoft.com/office/drawing/2014/main" id="{05F00D76-83AA-4A21-A069-077CAA6B03EB}"/>
               </a:ext>
             </a:extLst>
           </p:cNvPr>
@@ -4706,7 +4706,7 @@
           <p:cNvPr id="80" name="figure-four-placeholder">
             <a:extLst xmlns:a="http://schemas.openxmlformats.org/drawingml/2006/main">
               <a:ext uri="{FF2B5EF4-FFF2-40B4-BE49-F238E27FC236}">
-                <a16:creationId xmlns:a16="http://schemas.microsoft.com/office/drawing/2014/main" id="{3461A08B-ABAB-44AA-93D2-342663DCD80E}"/>
+                <a16:creationId xmlns:a16="http://schemas.microsoft.com/office/drawing/2014/main" id="{477970EC-8500-460C-B0DF-D06F84CF9F08}"/>
               </a:ext>
             </a:extLst>
           </p:cNvPr>
@@ -4741,7 +4741,7 @@
           <p:cNvPr id="81" name="figure-four-placeholder-label">
             <a:extLst xmlns:a="http://schemas.openxmlformats.org/drawingml/2006/main">
               <a:ext uri="{FF2B5EF4-FFF2-40B4-BE49-F238E27FC236}">
-                <a16:creationId xmlns:a16="http://schemas.microsoft.com/office/drawing/2014/main" id="{EB41FAEC-DDD7-4E6B-ADD4-6A28B4459555}"/>
+                <a16:creationId xmlns:a16="http://schemas.microsoft.com/office/drawing/2014/main" id="{697B1A1F-5184-4AED-8273-32DA0F895585}"/>
               </a:ext>
             </a:extLst>
           </p:cNvPr>
@@ -4769,19 +4769,19 @@
           <a:lstStyle xmlns:a="http://schemas.openxmlformats.org/drawingml/2006/main"/>
           <a:p xmlns:a="http://schemas.openxmlformats.org/drawingml/2006/main">
             <a:pPr algn="ctr">
-              <a:defRPr sz="2100" b="1">
+              <a:defRPr sz="1907" b="1">
                 <a:solidFill>
                   <a:srgbClr val="2C8C99"/>
                 </a:solidFill>
               </a:defRPr>
             </a:pPr>
             <a:r>
-              <a:rPr sz="2100" b="1">
+              <a:rPr sz="1907" b="1">
                 <a:solidFill>
                   <a:srgbClr val="2C8C99"/>
                 </a:solidFill>
               </a:rPr>
-              <a:t>SCIENTIFIC FIGURE</a:t>
+              <a:t>scientific figure</a:t>
             </a:r>
           </a:p>
         </p:txBody>
@@ -4791,7 +4791,7 @@
           <p:cNvPr id="82" name="figure-four-caption">
             <a:extLst xmlns:a="http://schemas.openxmlformats.org/drawingml/2006/main">
               <a:ext uri="{FF2B5EF4-FFF2-40B4-BE49-F238E27FC236}">
-                <a16:creationId xmlns:a16="http://schemas.microsoft.com/office/drawing/2014/main" id="{5E02B418-0C25-4A6F-99B4-F7F819BCA9A2}"/>
+                <a16:creationId xmlns:a16="http://schemas.microsoft.com/office/drawing/2014/main" id="{D0A5B649-846D-489E-A938-F144C4E6ABA1}"/>
               </a:ext>
             </a:extLst>
           </p:cNvPr>
@@ -4803,7 +4803,7 @@
         <p:spPr>
           <a:xfrm xmlns:a="http://schemas.openxmlformats.org/drawingml/2006/main">
             <a:off x="19802592" y="16836494"/>
-            <a:ext cx="9372373" cy="282514"/>
+            <a:ext cx="9372373" cy="221975"/>
           </a:xfrm>
           <a:prstGeom xmlns:a="http://schemas.openxmlformats.org/drawingml/2006/main" prst="rect">
             <a:avLst/>
@@ -4819,19 +4819,19 @@
           <a:lstStyle xmlns:a="http://schemas.openxmlformats.org/drawingml/2006/main"/>
           <a:p xmlns:a="http://schemas.openxmlformats.org/drawingml/2006/main">
             <a:pPr>
-              <a:defRPr sz="2205" b="1">
-                <a:solidFill>
-                  <a:srgbClr val="102A43"/>
-                </a:solidFill>
-              </a:defRPr>
-            </a:pPr>
-            <a:r>
-              <a:rPr sz="2205" b="1">
-                <a:solidFill>
-                  <a:srgbClr val="102A43"/>
-                </a:solidFill>
-              </a:rPr>
-              <a:t>Figure caption</a:t>
+              <a:defRPr sz="1589" b="1">
+                <a:solidFill>
+                  <a:srgbClr val="102A43"/>
+                </a:solidFill>
+              </a:defRPr>
+            </a:pPr>
+            <a:r>
+              <a:rPr sz="1589" b="1">
+                <a:solidFill>
+                  <a:srgbClr val="102A43"/>
+                </a:solidFill>
+              </a:rPr>
+              <a:t>Scientific Figure caption</a:t>
             </a:r>
           </a:p>
         </p:txBody>
@@ -4841,18 +4841,18 @@
           <p:cNvPr id="83" name="figure-four-source">
             <a:extLst xmlns:a="http://schemas.openxmlformats.org/drawingml/2006/main">
               <a:ext uri="{FF2B5EF4-FFF2-40B4-BE49-F238E27FC236}">
-                <a16:creationId xmlns:a16="http://schemas.microsoft.com/office/drawing/2014/main" id="{93268400-38FE-4C2B-8971-D9DB9218571E}"/>
-              </a:ext>
-            </a:extLst>
-          </p:cNvPr>
-          <p:cNvSpPr>
-            <a:spLocks xmlns:a="http://schemas.openxmlformats.org/drawingml/2006/main" noGrp="1"/>
-          </p:cNvSpPr>
-          <p:nvPr/>
-        </p:nvSpPr>
-        <p:spPr>
-          <a:xfrm xmlns:a="http://schemas.openxmlformats.org/drawingml/2006/main">
-            <a:off x="19802592" y="17058469"/>
+                <a16:creationId xmlns:a16="http://schemas.microsoft.com/office/drawing/2014/main" id="{5910E788-56A4-42F8-B0CE-2D526497CE78}"/>
+              </a:ext>
+            </a:extLst>
+          </p:cNvPr>
+          <p:cNvSpPr>
+            <a:spLocks xmlns:a="http://schemas.openxmlformats.org/drawingml/2006/main" noGrp="1"/>
+          </p:cNvSpPr>
+          <p:nvPr/>
+        </p:nvSpPr>
+        <p:spPr>
+          <a:xfrm xmlns:a="http://schemas.openxmlformats.org/drawingml/2006/main">
+            <a:off x="19802592" y="17065196"/>
             <a:ext cx="9372373" cy="255608"/>
           </a:xfrm>
           <a:prstGeom xmlns:a="http://schemas.openxmlformats.org/drawingml/2006/main" prst="rect">
@@ -4869,14 +4869,14 @@
           <a:lstStyle xmlns:a="http://schemas.openxmlformats.org/drawingml/2006/main"/>
           <a:p xmlns:a="http://schemas.openxmlformats.org/drawingml/2006/main">
             <a:pPr>
-              <a:defRPr sz="1650" i="1">
+              <a:defRPr sz="1324">
                 <a:solidFill>
                   <a:srgbClr val="2C8C99"/>
                 </a:solidFill>
               </a:defRPr>
             </a:pPr>
             <a:r>
-              <a:rPr sz="1650" i="1">
+              <a:rPr sz="1324">
                 <a:solidFill>
                   <a:srgbClr val="2C8C99"/>
                 </a:solidFill>
@@ -4891,7 +4891,7 @@
           <p:cNvPr id="84" name="conclusion-heading-title">
             <a:extLst xmlns:a="http://schemas.openxmlformats.org/drawingml/2006/main">
               <a:ext uri="{FF2B5EF4-FFF2-40B4-BE49-F238E27FC236}">
-                <a16:creationId xmlns:a16="http://schemas.microsoft.com/office/drawing/2014/main" id="{43CACFCD-29A7-4A64-B30F-2C38FE1B20D6}"/>
+                <a16:creationId xmlns:a16="http://schemas.microsoft.com/office/drawing/2014/main" id="{492F0506-1185-425F-9507-46BBA8C3F1AD}"/>
               </a:ext>
             </a:extLst>
           </p:cNvPr>
@@ -4919,14 +4919,14 @@
           <a:lstStyle xmlns:a="http://schemas.openxmlformats.org/drawingml/2006/main"/>
           <a:p xmlns:a="http://schemas.openxmlformats.org/drawingml/2006/main">
             <a:pPr>
-              <a:defRPr sz="2850" b="1">
+              <a:defRPr sz="2542" b="1">
                 <a:solidFill>
                   <a:srgbClr val="0F5F73"/>
                 </a:solidFill>
               </a:defRPr>
             </a:pPr>
             <a:r>
-              <a:rPr sz="2850" b="1">
+              <a:rPr sz="2542" b="1">
                 <a:solidFill>
                   <a:srgbClr val="0F5F73"/>
                 </a:solidFill>
@@ -4941,7 +4941,7 @@
           <p:cNvPr id="85" name="conclusion-heading-rule">
             <a:extLst xmlns:a="http://schemas.openxmlformats.org/drawingml/2006/main">
               <a:ext uri="{FF2B5EF4-FFF2-40B4-BE49-F238E27FC236}">
-                <a16:creationId xmlns:a16="http://schemas.microsoft.com/office/drawing/2014/main" id="{01EF6AB2-3457-40CB-9C67-346AABCD3AB1}"/>
+                <a16:creationId xmlns:a16="http://schemas.microsoft.com/office/drawing/2014/main" id="{7C051FFD-50FC-4349-8A84-36668B116F60}"/>
               </a:ext>
             </a:extLst>
           </p:cNvPr>
@@ -4974,7 +4974,7 @@
           <p:cNvPr id="86" name="conclusion-panel">
             <a:extLst xmlns:a="http://schemas.openxmlformats.org/drawingml/2006/main">
               <a:ext uri="{FF2B5EF4-FFF2-40B4-BE49-F238E27FC236}">
-                <a16:creationId xmlns:a16="http://schemas.microsoft.com/office/drawing/2014/main" id="{C8FB8638-C0DA-4FCC-8892-7B3EB6A64638}"/>
+                <a16:creationId xmlns:a16="http://schemas.microsoft.com/office/drawing/2014/main" id="{5535DEBB-8C73-4CCE-B3AA-DF2E790D7D85}"/>
               </a:ext>
             </a:extLst>
           </p:cNvPr>
@@ -5009,7 +5009,7 @@
           <p:cNvPr id="87" name="conclusion">
             <a:extLst xmlns:a="http://schemas.openxmlformats.org/drawingml/2006/main">
               <a:ext uri="{FF2B5EF4-FFF2-40B4-BE49-F238E27FC236}">
-                <a16:creationId xmlns:a16="http://schemas.microsoft.com/office/drawing/2014/main" id="{5ECE7C8A-6BE7-48E6-8D75-64A864BBBF93}"/>
+                <a16:creationId xmlns:a16="http://schemas.microsoft.com/office/drawing/2014/main" id="{3808F4DC-69A0-46EA-93A7-0C92A1EA7891}"/>
               </a:ext>
             </a:extLst>
           </p:cNvPr>
@@ -5037,14 +5037,14 @@
           <a:lstStyle xmlns:a="http://schemas.openxmlformats.org/drawingml/2006/main"/>
           <a:p xmlns:a="http://schemas.openxmlformats.org/drawingml/2006/main">
             <a:pPr>
-              <a:defRPr sz="2805">
-                <a:solidFill>
-                  <a:srgbClr val="102A43"/>
-                </a:solidFill>
-              </a:defRPr>
-            </a:pPr>
-            <a:r>
-              <a:rPr sz="2805">
+              <a:defRPr sz="2013">
+                <a:solidFill>
+                  <a:srgbClr val="102A43"/>
+                </a:solidFill>
+              </a:defRPr>
+            </a:pPr>
+            <a:r>
+              <a:rPr sz="2013">
                 <a:solidFill>
                   <a:srgbClr val="102A43"/>
                 </a:solidFill>
@@ -5059,7 +5059,7 @@
           <p:cNvPr id="88" name="conclusion-evidence">
             <a:extLst xmlns:a="http://schemas.openxmlformats.org/drawingml/2006/main">
               <a:ext uri="{FF2B5EF4-FFF2-40B4-BE49-F238E27FC236}">
-                <a16:creationId xmlns:a16="http://schemas.microsoft.com/office/drawing/2014/main" id="{AC663882-56F8-4765-902B-508562388F17}"/>
+                <a16:creationId xmlns:a16="http://schemas.microsoft.com/office/drawing/2014/main" id="{9CE6D682-5F0C-4B15-BCF6-A64A990BCCD8}"/>
               </a:ext>
             </a:extLst>
           </p:cNvPr>
@@ -5087,14 +5087,14 @@
           <a:lstStyle xmlns:a="http://schemas.openxmlformats.org/drawingml/2006/main"/>
           <a:p xmlns:a="http://schemas.openxmlformats.org/drawingml/2006/main">
             <a:pPr>
-              <a:defRPr sz="1650" i="1">
+              <a:defRPr sz="1324">
                 <a:solidFill>
                   <a:srgbClr val="2C8C99"/>
                 </a:solidFill>
               </a:defRPr>
             </a:pPr>
             <a:r>
-              <a:rPr sz="1650" i="1">
+              <a:rPr sz="1324">
                 <a:solidFill>
                   <a:srgbClr val="2C8C99"/>
                 </a:solidFill>
@@ -5109,7 +5109,7 @@
           <p:cNvPr id="89" name="footer-band">
             <a:extLst xmlns:a="http://schemas.openxmlformats.org/drawingml/2006/main">
               <a:ext uri="{FF2B5EF4-FFF2-40B4-BE49-F238E27FC236}">
-                <a16:creationId xmlns:a16="http://schemas.microsoft.com/office/drawing/2014/main" id="{5303ACCD-DEC3-43EA-A270-280432789EE3}"/>
+                <a16:creationId xmlns:a16="http://schemas.microsoft.com/office/drawing/2014/main" id="{373C93DB-435C-4B30-931C-8300E19B5045}"/>
               </a:ext>
             </a:extLst>
           </p:cNvPr>
@@ -5142,7 +5142,7 @@
           <p:cNvPr id="90" name="footer-source">
             <a:extLst xmlns:a="http://schemas.openxmlformats.org/drawingml/2006/main">
               <a:ext uri="{FF2B5EF4-FFF2-40B4-BE49-F238E27FC236}">
-                <a16:creationId xmlns:a16="http://schemas.microsoft.com/office/drawing/2014/main" id="{85DED568-5D08-4BA1-AB2E-52DAFFED8729}"/>
+                <a16:creationId xmlns:a16="http://schemas.microsoft.com/office/drawing/2014/main" id="{C7BB54CB-5F84-48D6-B596-03B37E3A0C7C}"/>
               </a:ext>
             </a:extLst>
           </p:cNvPr>
@@ -5154,7 +5154,7 @@
         <p:spPr>
           <a:xfrm xmlns:a="http://schemas.openxmlformats.org/drawingml/2006/main">
             <a:off x="943301" y="20899315"/>
-            <a:ext cx="20213601" cy="282514"/>
+            <a:ext cx="13543113" cy="282514"/>
           </a:xfrm>
           <a:prstGeom xmlns:a="http://schemas.openxmlformats.org/drawingml/2006/main" prst="rect">
             <a:avLst/>
@@ -5170,14 +5170,14 @@
           <a:lstStyle xmlns:a="http://schemas.openxmlformats.org/drawingml/2006/main"/>
           <a:p xmlns:a="http://schemas.openxmlformats.org/drawingml/2006/main">
             <a:pPr>
-              <a:defRPr sz="1650">
+              <a:defRPr sz="1377">
                 <a:solidFill>
                   <a:srgbClr val="FFFFFF"/>
                 </a:solidFill>
               </a:defRPr>
             </a:pPr>
             <a:r>
-              <a:rPr sz="1650">
+              <a:rPr sz="1377">
                 <a:solidFill>
                   <a:srgbClr val="FFFFFF"/>
                 </a:solidFill>
@@ -5192,19 +5192,19 @@
           <p:cNvPr id="91" name="footer-status">
             <a:extLst xmlns:a="http://schemas.openxmlformats.org/drawingml/2006/main">
               <a:ext uri="{FF2B5EF4-FFF2-40B4-BE49-F238E27FC236}">
-                <a16:creationId xmlns:a16="http://schemas.microsoft.com/office/drawing/2014/main" id="{8B472A99-2B96-4287-8DDD-0508A9F859F1}"/>
-              </a:ext>
-            </a:extLst>
-          </p:cNvPr>
-          <p:cNvSpPr>
-            <a:spLocks xmlns:a="http://schemas.openxmlformats.org/drawingml/2006/main" noGrp="1"/>
-          </p:cNvSpPr>
-          <p:nvPr/>
-        </p:nvSpPr>
-        <p:spPr>
-          <a:xfrm xmlns:a="http://schemas.openxmlformats.org/drawingml/2006/main">
-            <a:off x="21022146" y="20899315"/>
-            <a:ext cx="8287577" cy="282514"/>
+                <a16:creationId xmlns:a16="http://schemas.microsoft.com/office/drawing/2014/main" id="{C7461902-D317-4F2A-BEA4-8FE1AD7B179D}"/>
+              </a:ext>
+            </a:extLst>
+          </p:cNvPr>
+          <p:cNvSpPr>
+            <a:spLocks xmlns:a="http://schemas.openxmlformats.org/drawingml/2006/main" noGrp="1"/>
+          </p:cNvSpPr>
+          <p:nvPr/>
+        </p:nvSpPr>
+        <p:spPr>
+          <a:xfrm xmlns:a="http://schemas.openxmlformats.org/drawingml/2006/main">
+            <a:off x="14688550" y="20899315"/>
+            <a:ext cx="6131459" cy="282514"/>
           </a:xfrm>
           <a:prstGeom xmlns:a="http://schemas.openxmlformats.org/drawingml/2006/main" prst="rect">
             <a:avLst/>
@@ -5220,19 +5220,73 @@
           <a:lstStyle xmlns:a="http://schemas.openxmlformats.org/drawingml/2006/main"/>
           <a:p xmlns:a="http://schemas.openxmlformats.org/drawingml/2006/main">
             <a:pPr algn="r">
-              <a:defRPr sz="1575" b="1">
+              <a:defRPr sz="1271" b="1">
                 <a:solidFill>
                   <a:srgbClr val="E8B44C"/>
                 </a:solidFill>
               </a:defRPr>
             </a:pPr>
             <a:r>
-              <a:rPr sz="1575" b="1">
+              <a:rPr sz="1271" b="1">
                 <a:solidFill>
                   <a:srgbClr val="E8B44C"/>
                 </a:solidFill>
               </a:rPr>
-              <a:t>Approval status · scientific colors locked</a:t>
+              <a:t>Approvals current · scientific colors locked</a:t>
+            </a:r>
+          </a:p>
+        </p:txBody>
+      </p:sp>
+      <p:sp>
+        <p:nvSpPr>
+          <p:cNvPr id="92" name="POSTEX_PROVENANCE_MARK">
+            <a:extLst xmlns:a="http://schemas.openxmlformats.org/drawingml/2006/main">
+              <a:ext uri="{FF2B5EF4-FFF2-40B4-BE49-F238E27FC236}">
+                <a16:creationId xmlns:a16="http://schemas.microsoft.com/office/drawing/2014/main" id="{99C4781E-A328-4317-9B9F-8B1A0A60D42E}"/>
+              </a:ext>
+            </a:extLst>
+          </p:cNvPr>
+          <p:cNvSpPr>
+            <a:spLocks xmlns:a="http://schemas.openxmlformats.org/drawingml/2006/main" noGrp="1"/>
+          </p:cNvSpPr>
+          <p:nvPr/>
+        </p:nvSpPr>
+        <p:spPr>
+          <a:xfrm xmlns:a="http://schemas.openxmlformats.org/drawingml/2006/main">
+            <a:off x="21426418" y="20899315"/>
+            <a:ext cx="7883305" cy="282514"/>
+          </a:xfrm>
+          <a:prstGeom xmlns:a="http://schemas.openxmlformats.org/drawingml/2006/main" prst="rect">
+            <a:avLst/>
+          </a:prstGeom>
+          <a:noFill xmlns:a="http://schemas.openxmlformats.org/drawingml/2006/main"/>
+          <a:ln xmlns:a="http://schemas.openxmlformats.org/drawingml/2006/main" w="0">
+            <a:noFill/>
+            <a:prstDash val="solid"/>
+          </a:ln>
+        </p:spPr>
+        <p:txBody>
+          <a:bodyPr xmlns:a="http://schemas.openxmlformats.org/drawingml/2006/main"/>
+          <a:lstStyle xmlns:a="http://schemas.openxmlformats.org/drawingml/2006/main"/>
+          <a:p xmlns:a="http://schemas.openxmlformats.org/drawingml/2006/main">
+            <a:pPr algn="r">
+              <a:defRPr sz="1271" b="1">
+                <a:solidFill>
+                  <a:srgbClr val="FFFFFF">
+                    <a:alpha val="38000"/>
+                  </a:srgbClr>
+                </a:solidFill>
+              </a:defRPr>
+            </a:pPr>
+            <a:r>
+              <a:rPr sz="1271" b="1">
+                <a:solidFill>
+                  <a:srgbClr val="FFFFFF">
+                    <a:alpha val="38000"/>
+                  </a:srgbClr>
+                </a:solidFill>
+              </a:rPr>
+              <a:t>Made with PostEx™ · PX-00000000</a:t>
             </a:r>
           </a:p>
         </p:txBody>
@@ -5240,7 +5294,7 @@
     </p:spTree>
     <p:extLst>
       <p:ext uri="{BB962C8B-B14F-4D97-AF65-F5344CB8AC3E}">
-        <p14:creationId xmlns:p14="http://schemas.microsoft.com/office/powerpoint/2010/main" val="1323079904"/>
+        <p14:creationId xmlns:p14="http://schemas.microsoft.com/office/powerpoint/2010/main" val="1761065023"/>
       </p:ext>
     </p:extLst>
   </p:cSld>
